--- a/Лр1_С Буланый Дышлевая.pptx
+++ b/Лр1_С Буланый Дышлевая.pptx
@@ -216,7 +216,7 @@
           <a:p>
             <a:fld id="{55B5F127-EF7C-4D16-B460-0CE257C7E17B}" type="datetimeFigureOut">
               <a:rPr lang="ru-RU" smtClean="0"/>
-              <a:t>19.02.2026</a:t>
+              <a:t>26.02.2026</a:t>
             </a:fld>
             <a:endParaRPr lang="ru-RU"/>
           </a:p>
@@ -818,7 +818,7 @@
           <a:p>
             <a:fld id="{573E719D-693B-4A77-84DB-9E8C1D23A8C1}" type="datetime1">
               <a:rPr lang="ru-RU" smtClean="0"/>
-              <a:t>19.02.2026</a:t>
+              <a:t>26.02.2026</a:t>
             </a:fld>
             <a:endParaRPr lang="ru-RU"/>
           </a:p>
@@ -986,7 +986,7 @@
           <a:p>
             <a:fld id="{38D815C9-C4A9-460B-9F3D-D5B099F812AA}" type="datetime1">
               <a:rPr lang="ru-RU" smtClean="0"/>
-              <a:t>19.02.2026</a:t>
+              <a:t>26.02.2026</a:t>
             </a:fld>
             <a:endParaRPr lang="ru-RU"/>
           </a:p>
@@ -1164,7 +1164,7 @@
           <a:p>
             <a:fld id="{8FAECA59-152E-4437-ADB5-E4AD6E9B3A47}" type="datetime1">
               <a:rPr lang="ru-RU" smtClean="0"/>
-              <a:t>19.02.2026</a:t>
+              <a:t>26.02.2026</a:t>
             </a:fld>
             <a:endParaRPr lang="ru-RU"/>
           </a:p>
@@ -1332,7 +1332,7 @@
           <a:p>
             <a:fld id="{541E3134-B3F2-4317-B871-B88FB4A00131}" type="datetime1">
               <a:rPr lang="ru-RU" smtClean="0"/>
-              <a:t>19.02.2026</a:t>
+              <a:t>26.02.2026</a:t>
             </a:fld>
             <a:endParaRPr lang="ru-RU"/>
           </a:p>
@@ -1577,7 +1577,7 @@
           <a:p>
             <a:fld id="{FF7788A9-13F1-4F40-8019-093569E6E3EF}" type="datetime1">
               <a:rPr lang="ru-RU" smtClean="0"/>
-              <a:t>19.02.2026</a:t>
+              <a:t>26.02.2026</a:t>
             </a:fld>
             <a:endParaRPr lang="ru-RU"/>
           </a:p>
@@ -1806,7 +1806,7 @@
           <a:p>
             <a:fld id="{31B97AA0-6125-4875-A987-6C4FF4B5CE30}" type="datetime1">
               <a:rPr lang="ru-RU" smtClean="0"/>
-              <a:t>19.02.2026</a:t>
+              <a:t>26.02.2026</a:t>
             </a:fld>
             <a:endParaRPr lang="ru-RU"/>
           </a:p>
@@ -2170,7 +2170,7 @@
           <a:p>
             <a:fld id="{AF790800-C1F3-441D-AFE3-704E247D4095}" type="datetime1">
               <a:rPr lang="ru-RU" smtClean="0"/>
-              <a:t>19.02.2026</a:t>
+              <a:t>26.02.2026</a:t>
             </a:fld>
             <a:endParaRPr lang="ru-RU"/>
           </a:p>
@@ -2287,7 +2287,7 @@
           <a:p>
             <a:fld id="{3B8DE1E7-2FCF-4D15-B644-3CE192867603}" type="datetime1">
               <a:rPr lang="ru-RU" smtClean="0"/>
-              <a:t>19.02.2026</a:t>
+              <a:t>26.02.2026</a:t>
             </a:fld>
             <a:endParaRPr lang="ru-RU"/>
           </a:p>
@@ -2382,7 +2382,7 @@
           <a:p>
             <a:fld id="{7B69D6F9-9522-4E0E-B764-D722A322B6E0}" type="datetime1">
               <a:rPr lang="ru-RU" smtClean="0"/>
-              <a:t>19.02.2026</a:t>
+              <a:t>26.02.2026</a:t>
             </a:fld>
             <a:endParaRPr lang="ru-RU"/>
           </a:p>
@@ -2657,7 +2657,7 @@
           <a:p>
             <a:fld id="{2E60F34C-B6D8-4D1D-84D8-54213C78C279}" type="datetime1">
               <a:rPr lang="ru-RU" smtClean="0"/>
-              <a:t>19.02.2026</a:t>
+              <a:t>26.02.2026</a:t>
             </a:fld>
             <a:endParaRPr lang="ru-RU"/>
           </a:p>
@@ -2909,7 +2909,7 @@
           <a:p>
             <a:fld id="{6959A17E-64F2-46E8-BAC1-CFD826F028E0}" type="datetime1">
               <a:rPr lang="ru-RU" smtClean="0"/>
-              <a:t>19.02.2026</a:t>
+              <a:t>26.02.2026</a:t>
             </a:fld>
             <a:endParaRPr lang="ru-RU"/>
           </a:p>
@@ -3120,7 +3120,7 @@
           <a:p>
             <a:fld id="{72A24392-178F-4638-9B43-936544BC9B5A}" type="datetime1">
               <a:rPr lang="ru-RU" smtClean="0"/>
-              <a:t>19.02.2026</a:t>
+              <a:t>26.02.2026</a:t>
             </a:fld>
             <a:endParaRPr lang="ru-RU"/>
           </a:p>
@@ -3616,7 +3616,7 @@
         <p:spPr>
           <a:xfrm>
             <a:off x="626302" y="5086198"/>
-            <a:ext cx="5195378" cy="1107996"/>
+            <a:ext cx="5195378" cy="1569660"/>
           </a:xfrm>
           <a:prstGeom prst="rect">
             <a:avLst/>
@@ -3641,7 +3641,7 @@
                 <a:ea typeface="Tahoma" panose="020B0604030504040204" pitchFamily="34" charset="0"/>
                 <a:cs typeface="Arial" panose="020B0604020202020204" pitchFamily="34" charset="0"/>
               </a:rPr>
-              <a:t>Выполнили – студ. Буланый Сергей Евгеньевич, ТКИ-341, студ. Дышлевая Анна Сергеевна, ТКИ-341</a:t>
+              <a:t>Выполнили:</a:t>
             </a:r>
           </a:p>
           <a:p>
@@ -3657,7 +3657,71 @@
                 <a:ea typeface="Tahoma" panose="020B0604030504040204" pitchFamily="34" charset="0"/>
                 <a:cs typeface="Arial" panose="020B0604020202020204" pitchFamily="34" charset="0"/>
               </a:rPr>
-              <a:t>Проверили - д. т. н., проф. Сидоренко Валентина Геннадьевна, д. к. т. н. Сафронов Антон Игоревич </a:t>
+              <a:t>студ. Буланый Сергей Евгеньевич, ТКИ-341, </a:t>
+            </a:r>
+          </a:p>
+          <a:p>
+            <a:pPr algn="just"/>
+            <a:r>
+              <a:rPr lang="ru-RU" sz="1600" dirty="0">
+                <a:solidFill>
+                  <a:schemeClr val="accent5">
+                    <a:lumMod val="75000"/>
+                  </a:schemeClr>
+                </a:solidFill>
+                <a:latin typeface="Arial" panose="020B0604020202020204" pitchFamily="34" charset="0"/>
+                <a:ea typeface="Tahoma" panose="020B0604030504040204" pitchFamily="34" charset="0"/>
+                <a:cs typeface="Arial" panose="020B0604020202020204" pitchFamily="34" charset="0"/>
+              </a:rPr>
+              <a:t>студ. Дышлевая Анна Сергеевна, ТКИ-341</a:t>
+            </a:r>
+          </a:p>
+          <a:p>
+            <a:pPr algn="just"/>
+            <a:r>
+              <a:rPr lang="ru-RU" sz="1600" dirty="0">
+                <a:solidFill>
+                  <a:schemeClr val="accent5">
+                    <a:lumMod val="75000"/>
+                  </a:schemeClr>
+                </a:solidFill>
+                <a:latin typeface="Arial" panose="020B0604020202020204" pitchFamily="34" charset="0"/>
+                <a:ea typeface="Tahoma" panose="020B0604030504040204" pitchFamily="34" charset="0"/>
+                <a:cs typeface="Arial" panose="020B0604020202020204" pitchFamily="34" charset="0"/>
+              </a:rPr>
+              <a:t>Проверили:</a:t>
+            </a:r>
+          </a:p>
+          <a:p>
+            <a:pPr algn="just"/>
+            <a:r>
+              <a:rPr lang="ru-RU" sz="1600" dirty="0">
+                <a:solidFill>
+                  <a:schemeClr val="accent5">
+                    <a:lumMod val="75000"/>
+                  </a:schemeClr>
+                </a:solidFill>
+                <a:latin typeface="Arial" panose="020B0604020202020204" pitchFamily="34" charset="0"/>
+                <a:ea typeface="Tahoma" panose="020B0604030504040204" pitchFamily="34" charset="0"/>
+                <a:cs typeface="Arial" panose="020B0604020202020204" pitchFamily="34" charset="0"/>
+              </a:rPr>
+              <a:t>д. т. н., проф. Сидоренко Валентина Геннадьевна, </a:t>
+            </a:r>
+          </a:p>
+          <a:p>
+            <a:pPr algn="just"/>
+            <a:r>
+              <a:rPr lang="ru-RU" sz="1600" dirty="0">
+                <a:solidFill>
+                  <a:schemeClr val="accent5">
+                    <a:lumMod val="75000"/>
+                  </a:schemeClr>
+                </a:solidFill>
+                <a:latin typeface="Arial" panose="020B0604020202020204" pitchFamily="34" charset="0"/>
+                <a:ea typeface="Tahoma" panose="020B0604030504040204" pitchFamily="34" charset="0"/>
+                <a:cs typeface="Arial" panose="020B0604020202020204" pitchFamily="34" charset="0"/>
+              </a:rPr>
+              <a:t>д. к. т. н. Сафронов Антон Игоревич </a:t>
             </a:r>
           </a:p>
         </p:txBody>
@@ -12670,7 +12734,7 @@
           <p:nvPr>
             <p:extLst>
               <p:ext uri="{D42A27DB-BD31-4B8C-83A1-F6EECF244321}">
-                <p14:modId xmlns:p14="http://schemas.microsoft.com/office/powerpoint/2010/main" val="4241208379"/>
+                <p14:modId xmlns:p14="http://schemas.microsoft.com/office/powerpoint/2010/main" val="1217181424"/>
               </p:ext>
             </p:extLst>
           </p:nvPr>
@@ -12782,7 +12846,9 @@
                       <a:headEnd type="none" w="med" len="med"/>
                       <a:tailEnd type="none" w="med" len="med"/>
                     </a:lnB>
-                    <a:noFill/>
+                    <a:solidFill>
+                      <a:srgbClr val="FF0000"/>
+                    </a:solidFill>
                   </a:tcPr>
                 </a:tc>
                 <a:tc>
@@ -12866,7 +12932,9 @@
                       <a:headEnd type="none" w="med" len="med"/>
                       <a:tailEnd type="none" w="med" len="med"/>
                     </a:lnB>
-                    <a:noFill/>
+                    <a:solidFill>
+                      <a:srgbClr val="FF0000"/>
+                    </a:solidFill>
                   </a:tcPr>
                 </a:tc>
                 <a:tc>
@@ -12878,7 +12946,7 @@
                         <a:buNone/>
                       </a:pPr>
                       <a:r>
-                        <a:rPr lang="ru-RU" sz="1300" b="0" i="0" u="none" strike="noStrike">
+                        <a:rPr lang="ru-RU" sz="1300" b="0" i="0" u="none" strike="noStrike" dirty="0">
                           <a:solidFill>
                             <a:srgbClr val="000000"/>
                           </a:solidFill>
@@ -12887,7 +12955,7 @@
                         </a:rPr>
                         <a:t>Энтропия</a:t>
                       </a:r>
-                      <a:endParaRPr lang="ru-RU" sz="1300" b="0" i="0" u="none" strike="noStrike">
+                      <a:endParaRPr lang="ru-RU" sz="1300" b="0" i="0" u="none" strike="noStrike" dirty="0">
                         <a:effectLst/>
                         <a:latin typeface="Arial" panose="020B0604020202020204" pitchFamily="34" charset="0"/>
                       </a:endParaRPr>
@@ -12930,7 +12998,9 @@
                       <a:headEnd type="none" w="med" len="med"/>
                       <a:tailEnd type="none" w="med" len="med"/>
                     </a:lnB>
-                    <a:noFill/>
+                    <a:solidFill>
+                      <a:srgbClr val="FF0000"/>
+                    </a:solidFill>
                   </a:tcPr>
                 </a:tc>
                 <a:tc>
@@ -12994,7 +13064,9 @@
                       <a:headEnd type="none" w="med" len="med"/>
                       <a:tailEnd type="none" w="med" len="med"/>
                     </a:lnB>
-                    <a:noFill/>
+                    <a:solidFill>
+                      <a:srgbClr val="FF0000"/>
+                    </a:solidFill>
                   </a:tcPr>
                 </a:tc>
                 <a:tc>
@@ -13006,7 +13078,7 @@
                         <a:buNone/>
                       </a:pPr>
                       <a:r>
-                        <a:rPr lang="ru-RU" sz="1300" b="0" i="0" u="none" strike="noStrike">
+                        <a:rPr lang="ru-RU" sz="1300" b="0" i="0" u="none" strike="noStrike" dirty="0">
                           <a:solidFill>
                             <a:srgbClr val="000000"/>
                           </a:solidFill>
@@ -13015,7 +13087,7 @@
                         </a:rPr>
                         <a:t>Отношение энтропий</a:t>
                       </a:r>
-                      <a:endParaRPr lang="ru-RU" sz="1300" b="0" i="0" u="none" strike="noStrike">
+                      <a:endParaRPr lang="ru-RU" sz="1300" b="0" i="0" u="none" strike="noStrike" dirty="0">
                         <a:effectLst/>
                         <a:latin typeface="Arial" panose="020B0604020202020204" pitchFamily="34" charset="0"/>
                       </a:endParaRPr>
@@ -13058,7 +13130,9 @@
                       <a:headEnd type="none" w="med" len="med"/>
                       <a:tailEnd type="none" w="med" len="med"/>
                     </a:lnB>
-                    <a:noFill/>
+                    <a:solidFill>
+                      <a:srgbClr val="FF0000"/>
+                    </a:solidFill>
                   </a:tcPr>
                 </a:tc>
                 <a:extLst>
@@ -13129,7 +13203,9 @@
                       <a:headEnd type="none" w="med" len="med"/>
                       <a:tailEnd type="none" w="med" len="med"/>
                     </a:lnB>
-                    <a:noFill/>
+                    <a:solidFill>
+                      <a:srgbClr val="FFFF00"/>
+                    </a:solidFill>
                   </a:tcPr>
                 </a:tc>
                 <a:tc>
@@ -13193,7 +13269,9 @@
                       <a:headEnd type="none" w="med" len="med"/>
                       <a:tailEnd type="none" w="med" len="med"/>
                     </a:lnB>
-                    <a:noFill/>
+                    <a:solidFill>
+                      <a:srgbClr val="FFFF00"/>
+                    </a:solidFill>
                   </a:tcPr>
                 </a:tc>
                 <a:tc>
@@ -13257,7 +13335,9 @@
                       <a:headEnd type="none" w="med" len="med"/>
                       <a:tailEnd type="none" w="med" len="med"/>
                     </a:lnB>
-                    <a:noFill/>
+                    <a:solidFill>
+                      <a:srgbClr val="FFFF00"/>
+                    </a:solidFill>
                   </a:tcPr>
                 </a:tc>
                 <a:tc>
@@ -13321,7 +13401,9 @@
                       <a:headEnd type="none" w="med" len="med"/>
                       <a:tailEnd type="none" w="med" len="med"/>
                     </a:lnB>
-                    <a:noFill/>
+                    <a:solidFill>
+                      <a:srgbClr val="FFFF00"/>
+                    </a:solidFill>
                   </a:tcPr>
                 </a:tc>
                 <a:tc>
@@ -13385,7 +13467,9 @@
                       <a:headEnd type="none" w="med" len="med"/>
                       <a:tailEnd type="none" w="med" len="med"/>
                     </a:lnB>
-                    <a:noFill/>
+                    <a:solidFill>
+                      <a:srgbClr val="FFFF00"/>
+                    </a:solidFill>
                   </a:tcPr>
                 </a:tc>
                 <a:extLst>
@@ -13456,7 +13540,9 @@
                       <a:headEnd type="none" w="med" len="med"/>
                       <a:tailEnd type="none" w="med" len="med"/>
                     </a:lnB>
-                    <a:noFill/>
+                    <a:solidFill>
+                      <a:srgbClr val="FFFF00"/>
+                    </a:solidFill>
                   </a:tcPr>
                 </a:tc>
                 <a:tc>
@@ -13468,7 +13554,7 @@
                         <a:buNone/>
                       </a:pPr>
                       <a:r>
-                        <a:rPr lang="ru-RU" sz="1300" b="0" i="0" u="none" strike="noStrike">
+                        <a:rPr lang="ru-RU" sz="1300" b="0" i="0" u="none" strike="noStrike" dirty="0">
                           <a:solidFill>
                             <a:srgbClr val="000000"/>
                           </a:solidFill>
@@ -13477,7 +13563,7 @@
                         </a:rPr>
                         <a:t>12,00</a:t>
                       </a:r>
-                      <a:endParaRPr lang="ru-RU" sz="1300" b="0" i="0" u="none" strike="noStrike">
+                      <a:endParaRPr lang="ru-RU" sz="1300" b="0" i="0" u="none" strike="noStrike" dirty="0">
                         <a:effectLst/>
                         <a:latin typeface="Arial" panose="020B0604020202020204" pitchFamily="34" charset="0"/>
                       </a:endParaRPr>
@@ -13520,7 +13606,9 @@
                       <a:headEnd type="none" w="med" len="med"/>
                       <a:tailEnd type="none" w="med" len="med"/>
                     </a:lnB>
-                    <a:noFill/>
+                    <a:solidFill>
+                      <a:srgbClr val="FFFF00"/>
+                    </a:solidFill>
                   </a:tcPr>
                 </a:tc>
                 <a:tc>
@@ -13532,7 +13620,7 @@
                         <a:buNone/>
                       </a:pPr>
                       <a:r>
-                        <a:rPr lang="ru-RU" sz="1300" b="0" i="0" u="none" strike="noStrike">
+                        <a:rPr lang="ru-RU" sz="1300" b="0" i="0" u="none" strike="noStrike" dirty="0">
                           <a:solidFill>
                             <a:srgbClr val="000000"/>
                           </a:solidFill>
@@ -13541,7 +13629,7 @@
                         </a:rPr>
                         <a:t>7,22</a:t>
                       </a:r>
-                      <a:endParaRPr lang="ru-RU" sz="1300" b="0" i="0" u="none" strike="noStrike">
+                      <a:endParaRPr lang="ru-RU" sz="1300" b="0" i="0" u="none" strike="noStrike" dirty="0">
                         <a:effectLst/>
                         <a:latin typeface="Arial" panose="020B0604020202020204" pitchFamily="34" charset="0"/>
                       </a:endParaRPr>
@@ -13584,7 +13672,9 @@
                       <a:headEnd type="none" w="med" len="med"/>
                       <a:tailEnd type="none" w="med" len="med"/>
                     </a:lnB>
-                    <a:noFill/>
+                    <a:solidFill>
+                      <a:srgbClr val="FFFF00"/>
+                    </a:solidFill>
                   </a:tcPr>
                 </a:tc>
                 <a:tc>
@@ -13648,7 +13738,9 @@
                       <a:headEnd type="none" w="med" len="med"/>
                       <a:tailEnd type="none" w="med" len="med"/>
                     </a:lnB>
-                    <a:noFill/>
+                    <a:solidFill>
+                      <a:srgbClr val="FFFF00"/>
+                    </a:solidFill>
                   </a:tcPr>
                 </a:tc>
                 <a:tc>
@@ -13712,7 +13804,9 @@
                       <a:headEnd type="none" w="med" len="med"/>
                       <a:tailEnd type="none" w="med" len="med"/>
                     </a:lnB>
-                    <a:noFill/>
+                    <a:solidFill>
+                      <a:srgbClr val="FFFF00"/>
+                    </a:solidFill>
                   </a:tcPr>
                 </a:tc>
                 <a:extLst>
@@ -13783,7 +13877,9 @@
                       <a:headEnd type="none" w="med" len="med"/>
                       <a:tailEnd type="none" w="med" len="med"/>
                     </a:lnB>
-                    <a:noFill/>
+                    <a:solidFill>
+                      <a:srgbClr val="FFFF00"/>
+                    </a:solidFill>
                   </a:tcPr>
                 </a:tc>
                 <a:tc>
@@ -13795,7 +13891,7 @@
                         <a:buNone/>
                       </a:pPr>
                       <a:r>
-                        <a:rPr lang="ru-RU" sz="1300" b="0" i="0" u="none" strike="noStrike">
+                        <a:rPr lang="ru-RU" sz="1300" b="0" i="0" u="none" strike="noStrike" dirty="0">
                           <a:solidFill>
                             <a:srgbClr val="000000"/>
                           </a:solidFill>
@@ -13804,7 +13900,7 @@
                         </a:rPr>
                         <a:t>8,00</a:t>
                       </a:r>
-                      <a:endParaRPr lang="ru-RU" sz="1300" b="0" i="0" u="none" strike="noStrike">
+                      <a:endParaRPr lang="ru-RU" sz="1300" b="0" i="0" u="none" strike="noStrike" dirty="0">
                         <a:effectLst/>
                         <a:latin typeface="Arial" panose="020B0604020202020204" pitchFamily="34" charset="0"/>
                       </a:endParaRPr>
@@ -13847,7 +13943,9 @@
                       <a:headEnd type="none" w="med" len="med"/>
                       <a:tailEnd type="none" w="med" len="med"/>
                     </a:lnB>
-                    <a:noFill/>
+                    <a:solidFill>
+                      <a:srgbClr val="FFFF00"/>
+                    </a:solidFill>
                   </a:tcPr>
                 </a:tc>
                 <a:tc>
@@ -13911,7 +14009,9 @@
                       <a:headEnd type="none" w="med" len="med"/>
                       <a:tailEnd type="none" w="med" len="med"/>
                     </a:lnB>
-                    <a:noFill/>
+                    <a:solidFill>
+                      <a:srgbClr val="FFFF00"/>
+                    </a:solidFill>
                   </a:tcPr>
                 </a:tc>
                 <a:tc>
@@ -13923,7 +14023,7 @@
                         <a:buNone/>
                       </a:pPr>
                       <a:r>
-                        <a:rPr lang="ru-RU" sz="1300" b="0" i="0" u="none" strike="noStrike">
+                        <a:rPr lang="ru-RU" sz="1300" b="0" i="0" u="none" strike="noStrike" dirty="0">
                           <a:solidFill>
                             <a:srgbClr val="000000"/>
                           </a:solidFill>
@@ -13932,7 +14032,7 @@
                         </a:rPr>
                         <a:t>0,13</a:t>
                       </a:r>
-                      <a:endParaRPr lang="ru-RU" sz="1300" b="0" i="0" u="none" strike="noStrike">
+                      <a:endParaRPr lang="ru-RU" sz="1300" b="0" i="0" u="none" strike="noStrike" dirty="0">
                         <a:effectLst/>
                         <a:latin typeface="Arial" panose="020B0604020202020204" pitchFamily="34" charset="0"/>
                       </a:endParaRPr>
@@ -13975,7 +14075,9 @@
                       <a:headEnd type="none" w="med" len="med"/>
                       <a:tailEnd type="none" w="med" len="med"/>
                     </a:lnB>
-                    <a:noFill/>
+                    <a:solidFill>
+                      <a:srgbClr val="FFFF00"/>
+                    </a:solidFill>
                   </a:tcPr>
                 </a:tc>
                 <a:tc>
@@ -13987,7 +14089,7 @@
                         <a:buNone/>
                       </a:pPr>
                       <a:r>
-                        <a:rPr lang="ru-RU" sz="1300" b="0" i="0" u="none" strike="noStrike">
+                        <a:rPr lang="ru-RU" sz="1300" b="0" i="0" u="none" strike="noStrike" dirty="0">
                           <a:solidFill>
                             <a:srgbClr val="000000"/>
                           </a:solidFill>
@@ -13996,7 +14098,7 @@
                         </a:rPr>
                         <a:t>1,35</a:t>
                       </a:r>
-                      <a:endParaRPr lang="ru-RU" sz="1300" b="0" i="0" u="none" strike="noStrike">
+                      <a:endParaRPr lang="ru-RU" sz="1300" b="0" i="0" u="none" strike="noStrike" dirty="0">
                         <a:effectLst/>
                         <a:latin typeface="Arial" panose="020B0604020202020204" pitchFamily="34" charset="0"/>
                       </a:endParaRPr>
@@ -14039,7 +14141,9 @@
                       <a:headEnd type="none" w="med" len="med"/>
                       <a:tailEnd type="none" w="med" len="med"/>
                     </a:lnB>
-                    <a:noFill/>
+                    <a:solidFill>
+                      <a:srgbClr val="FFFF00"/>
+                    </a:solidFill>
                   </a:tcPr>
                 </a:tc>
                 <a:extLst>
@@ -14110,7 +14214,9 @@
                       <a:headEnd type="none" w="med" len="med"/>
                       <a:tailEnd type="none" w="med" len="med"/>
                     </a:lnB>
-                    <a:noFill/>
+                    <a:solidFill>
+                      <a:srgbClr val="FFC000"/>
+                    </a:solidFill>
                   </a:tcPr>
                 </a:tc>
                 <a:tc>
@@ -14174,7 +14280,9 @@
                       <a:headEnd type="none" w="med" len="med"/>
                       <a:tailEnd type="none" w="med" len="med"/>
                     </a:lnB>
-                    <a:noFill/>
+                    <a:solidFill>
+                      <a:srgbClr val="FFC000"/>
+                    </a:solidFill>
                   </a:tcPr>
                 </a:tc>
                 <a:tc>
@@ -14238,7 +14346,9 @@
                       <a:headEnd type="none" w="med" len="med"/>
                       <a:tailEnd type="none" w="med" len="med"/>
                     </a:lnB>
-                    <a:noFill/>
+                    <a:solidFill>
+                      <a:srgbClr val="FFC000"/>
+                    </a:solidFill>
                   </a:tcPr>
                 </a:tc>
                 <a:tc>
@@ -14302,7 +14412,9 @@
                       <a:headEnd type="none" w="med" len="med"/>
                       <a:tailEnd type="none" w="med" len="med"/>
                     </a:lnB>
-                    <a:noFill/>
+                    <a:solidFill>
+                      <a:srgbClr val="FFC000"/>
+                    </a:solidFill>
                   </a:tcPr>
                 </a:tc>
                 <a:tc>
@@ -14366,7 +14478,9 @@
                       <a:headEnd type="none" w="med" len="med"/>
                       <a:tailEnd type="none" w="med" len="med"/>
                     </a:lnB>
-                    <a:noFill/>
+                    <a:solidFill>
+                      <a:srgbClr val="FFC000"/>
+                    </a:solidFill>
                   </a:tcPr>
                 </a:tc>
                 <a:extLst>
@@ -14437,7 +14551,9 @@
                       <a:headEnd type="none" w="med" len="med"/>
                       <a:tailEnd type="none" w="med" len="med"/>
                     </a:lnB>
-                    <a:noFill/>
+                    <a:solidFill>
+                      <a:srgbClr val="FFC000"/>
+                    </a:solidFill>
                   </a:tcPr>
                 </a:tc>
                 <a:tc>
@@ -14501,7 +14617,9 @@
                       <a:headEnd type="none" w="med" len="med"/>
                       <a:tailEnd type="none" w="med" len="med"/>
                     </a:lnB>
-                    <a:noFill/>
+                    <a:solidFill>
+                      <a:srgbClr val="FFC000"/>
+                    </a:solidFill>
                   </a:tcPr>
                 </a:tc>
                 <a:tc>
@@ -14565,7 +14683,9 @@
                       <a:headEnd type="none" w="med" len="med"/>
                       <a:tailEnd type="none" w="med" len="med"/>
                     </a:lnB>
-                    <a:noFill/>
+                    <a:solidFill>
+                      <a:srgbClr val="FFC000"/>
+                    </a:solidFill>
                   </a:tcPr>
                 </a:tc>
                 <a:tc>
@@ -14629,7 +14749,9 @@
                       <a:headEnd type="none" w="med" len="med"/>
                       <a:tailEnd type="none" w="med" len="med"/>
                     </a:lnB>
-                    <a:noFill/>
+                    <a:solidFill>
+                      <a:srgbClr val="FFC000"/>
+                    </a:solidFill>
                   </a:tcPr>
                 </a:tc>
                 <a:tc>
@@ -14693,7 +14815,9 @@
                       <a:headEnd type="none" w="med" len="med"/>
                       <a:tailEnd type="none" w="med" len="med"/>
                     </a:lnB>
-                    <a:noFill/>
+                    <a:solidFill>
+                      <a:srgbClr val="FFC000"/>
+                    </a:solidFill>
                   </a:tcPr>
                 </a:tc>
                 <a:extLst>
@@ -14764,7 +14888,9 @@
                       <a:headEnd type="none" w="med" len="med"/>
                       <a:tailEnd type="none" w="med" len="med"/>
                     </a:lnB>
-                    <a:noFill/>
+                    <a:solidFill>
+                      <a:srgbClr val="FFC000"/>
+                    </a:solidFill>
                   </a:tcPr>
                 </a:tc>
                 <a:tc>
@@ -14828,7 +14954,9 @@
                       <a:headEnd type="none" w="med" len="med"/>
                       <a:tailEnd type="none" w="med" len="med"/>
                     </a:lnB>
-                    <a:noFill/>
+                    <a:solidFill>
+                      <a:srgbClr val="FFC000"/>
+                    </a:solidFill>
                   </a:tcPr>
                 </a:tc>
                 <a:tc>
@@ -14840,7 +14968,7 @@
                         <a:buNone/>
                       </a:pPr>
                       <a:r>
-                        <a:rPr lang="ru-RU" sz="1300" b="0" i="0" u="none" strike="noStrike">
+                        <a:rPr lang="ru-RU" sz="1300" b="0" i="0" u="none" strike="noStrike" dirty="0">
                           <a:solidFill>
                             <a:srgbClr val="000000"/>
                           </a:solidFill>
@@ -14849,7 +14977,7 @@
                         </a:rPr>
                         <a:t>7,90</a:t>
                       </a:r>
-                      <a:endParaRPr lang="ru-RU" sz="1300" b="0" i="0" u="none" strike="noStrike">
+                      <a:endParaRPr lang="ru-RU" sz="1300" b="0" i="0" u="none" strike="noStrike" dirty="0">
                         <a:effectLst/>
                         <a:latin typeface="Arial" panose="020B0604020202020204" pitchFamily="34" charset="0"/>
                       </a:endParaRPr>
@@ -14892,7 +15020,9 @@
                       <a:headEnd type="none" w="med" len="med"/>
                       <a:tailEnd type="none" w="med" len="med"/>
                     </a:lnB>
-                    <a:noFill/>
+                    <a:solidFill>
+                      <a:srgbClr val="FFC000"/>
+                    </a:solidFill>
                   </a:tcPr>
                 </a:tc>
                 <a:tc>
@@ -14904,7 +15034,7 @@
                         <a:buNone/>
                       </a:pPr>
                       <a:r>
-                        <a:rPr lang="ru-RU" sz="1300" b="0" i="0" u="none" strike="noStrike">
+                        <a:rPr lang="ru-RU" sz="1300" b="0" i="0" u="none" strike="noStrike" dirty="0">
                           <a:solidFill>
                             <a:srgbClr val="000000"/>
                           </a:solidFill>
@@ -14913,7 +15043,7 @@
                         </a:rPr>
                         <a:t>0,38</a:t>
                       </a:r>
-                      <a:endParaRPr lang="ru-RU" sz="1300" b="0" i="0" u="none" strike="noStrike">
+                      <a:endParaRPr lang="ru-RU" sz="1300" b="0" i="0" u="none" strike="noStrike" dirty="0">
                         <a:effectLst/>
                         <a:latin typeface="Arial" panose="020B0604020202020204" pitchFamily="34" charset="0"/>
                       </a:endParaRPr>
@@ -14956,7 +15086,9 @@
                       <a:headEnd type="none" w="med" len="med"/>
                       <a:tailEnd type="none" w="med" len="med"/>
                     </a:lnB>
-                    <a:noFill/>
+                    <a:solidFill>
+                      <a:srgbClr val="FFC000"/>
+                    </a:solidFill>
                   </a:tcPr>
                 </a:tc>
                 <a:tc>
@@ -14968,7 +15100,7 @@
                         <a:buNone/>
                       </a:pPr>
                       <a:r>
-                        <a:rPr lang="ru-RU" sz="1300" b="0" i="0" u="none" strike="noStrike">
+                        <a:rPr lang="ru-RU" sz="1300" b="0" i="0" u="none" strike="noStrike" dirty="0">
                           <a:solidFill>
                             <a:srgbClr val="000000"/>
                           </a:solidFill>
@@ -14977,7 +15109,7 @@
                         </a:rPr>
                         <a:t>1,30</a:t>
                       </a:r>
-                      <a:endParaRPr lang="ru-RU" sz="1300" b="0" i="0" u="none" strike="noStrike">
+                      <a:endParaRPr lang="ru-RU" sz="1300" b="0" i="0" u="none" strike="noStrike" dirty="0">
                         <a:effectLst/>
                         <a:latin typeface="Arial" panose="020B0604020202020204" pitchFamily="34" charset="0"/>
                       </a:endParaRPr>
@@ -15020,7 +15152,9 @@
                       <a:headEnd type="none" w="med" len="med"/>
                       <a:tailEnd type="none" w="med" len="med"/>
                     </a:lnB>
-                    <a:noFill/>
+                    <a:solidFill>
+                      <a:srgbClr val="FFC000"/>
+                    </a:solidFill>
                   </a:tcPr>
                 </a:tc>
                 <a:extLst>
@@ -15091,7 +15225,9 @@
                       <a:headEnd type="none" w="med" len="med"/>
                       <a:tailEnd type="none" w="med" len="med"/>
                     </a:lnB>
-                    <a:noFill/>
+                    <a:solidFill>
+                      <a:srgbClr val="92D050"/>
+                    </a:solidFill>
                   </a:tcPr>
                 </a:tc>
                 <a:tc>
@@ -15155,7 +15291,9 @@
                       <a:headEnd type="none" w="med" len="med"/>
                       <a:tailEnd type="none" w="med" len="med"/>
                     </a:lnB>
-                    <a:noFill/>
+                    <a:solidFill>
+                      <a:srgbClr val="92D050"/>
+                    </a:solidFill>
                   </a:tcPr>
                 </a:tc>
                 <a:tc>
@@ -15167,7 +15305,7 @@
                         <a:buNone/>
                       </a:pPr>
                       <a:r>
-                        <a:rPr lang="ru-RU" sz="1300" b="0" i="0" u="none" strike="noStrike">
+                        <a:rPr lang="ru-RU" sz="1300" b="0" i="0" u="none" strike="noStrike" dirty="0">
                           <a:solidFill>
                             <a:srgbClr val="000000"/>
                           </a:solidFill>
@@ -15176,7 +15314,7 @@
                         </a:rPr>
                         <a:t>7,99</a:t>
                       </a:r>
-                      <a:endParaRPr lang="ru-RU" sz="1300" b="0" i="0" u="none" strike="noStrike">
+                      <a:endParaRPr lang="ru-RU" sz="1300" b="0" i="0" u="none" strike="noStrike" dirty="0">
                         <a:effectLst/>
                         <a:latin typeface="Arial" panose="020B0604020202020204" pitchFamily="34" charset="0"/>
                       </a:endParaRPr>
@@ -15219,7 +15357,9 @@
                       <a:headEnd type="none" w="med" len="med"/>
                       <a:tailEnd type="none" w="med" len="med"/>
                     </a:lnB>
-                    <a:noFill/>
+                    <a:solidFill>
+                      <a:srgbClr val="92D050"/>
+                    </a:solidFill>
                   </a:tcPr>
                 </a:tc>
                 <a:tc>
@@ -15283,7 +15423,9 @@
                       <a:headEnd type="none" w="med" len="med"/>
                       <a:tailEnd type="none" w="med" len="med"/>
                     </a:lnB>
-                    <a:noFill/>
+                    <a:solidFill>
+                      <a:srgbClr val="92D050"/>
+                    </a:solidFill>
                   </a:tcPr>
                 </a:tc>
                 <a:tc>
@@ -15347,7 +15489,9 @@
                       <a:headEnd type="none" w="med" len="med"/>
                       <a:tailEnd type="none" w="med" len="med"/>
                     </a:lnB>
-                    <a:noFill/>
+                    <a:solidFill>
+                      <a:srgbClr val="92D050"/>
+                    </a:solidFill>
                   </a:tcPr>
                 </a:tc>
                 <a:extLst>
@@ -15418,7 +15562,9 @@
                       <a:headEnd type="none" w="med" len="med"/>
                       <a:tailEnd type="none" w="med" len="med"/>
                     </a:lnB>
-                    <a:noFill/>
+                    <a:solidFill>
+                      <a:srgbClr val="92D050"/>
+                    </a:solidFill>
                   </a:tcPr>
                 </a:tc>
                 <a:tc>
@@ -15482,7 +15628,9 @@
                       <a:headEnd type="none" w="med" len="med"/>
                       <a:tailEnd type="none" w="med" len="med"/>
                     </a:lnB>
-                    <a:noFill/>
+                    <a:solidFill>
+                      <a:srgbClr val="92D050"/>
+                    </a:solidFill>
                   </a:tcPr>
                 </a:tc>
                 <a:tc>
@@ -15546,7 +15694,9 @@
                       <a:headEnd type="none" w="med" len="med"/>
                       <a:tailEnd type="none" w="med" len="med"/>
                     </a:lnB>
-                    <a:noFill/>
+                    <a:solidFill>
+                      <a:srgbClr val="92D050"/>
+                    </a:solidFill>
                   </a:tcPr>
                 </a:tc>
                 <a:tc>
@@ -15610,7 +15760,9 @@
                       <a:headEnd type="none" w="med" len="med"/>
                       <a:tailEnd type="none" w="med" len="med"/>
                     </a:lnB>
-                    <a:noFill/>
+                    <a:solidFill>
+                      <a:srgbClr val="92D050"/>
+                    </a:solidFill>
                   </a:tcPr>
                 </a:tc>
                 <a:tc>
@@ -15674,7 +15826,9 @@
                       <a:headEnd type="none" w="med" len="med"/>
                       <a:tailEnd type="none" w="med" len="med"/>
                     </a:lnB>
-                    <a:noFill/>
+                    <a:solidFill>
+                      <a:srgbClr val="92D050"/>
+                    </a:solidFill>
                   </a:tcPr>
                 </a:tc>
                 <a:extLst>
@@ -15745,7 +15899,9 @@
                       <a:headEnd type="none" w="med" len="med"/>
                       <a:tailEnd type="none" w="med" len="med"/>
                     </a:lnB>
-                    <a:noFill/>
+                    <a:solidFill>
+                      <a:srgbClr val="92D050"/>
+                    </a:solidFill>
                   </a:tcPr>
                 </a:tc>
                 <a:tc>
@@ -15809,7 +15965,9 @@
                       <a:headEnd type="none" w="med" len="med"/>
                       <a:tailEnd type="none" w="med" len="med"/>
                     </a:lnB>
-                    <a:noFill/>
+                    <a:solidFill>
+                      <a:srgbClr val="92D050"/>
+                    </a:solidFill>
                   </a:tcPr>
                 </a:tc>
                 <a:tc>
@@ -15821,7 +15979,7 @@
                         <a:buNone/>
                       </a:pPr>
                       <a:r>
-                        <a:rPr lang="ru-RU" sz="1300" b="0" i="0" u="none" strike="noStrike">
+                        <a:rPr lang="ru-RU" sz="1300" b="0" i="0" u="none" strike="noStrike" dirty="0">
                           <a:solidFill>
                             <a:srgbClr val="000000"/>
                           </a:solidFill>
@@ -15830,7 +15988,7 @@
                         </a:rPr>
                         <a:t>8,00</a:t>
                       </a:r>
-                      <a:endParaRPr lang="ru-RU" sz="1300" b="0" i="0" u="none" strike="noStrike">
+                      <a:endParaRPr lang="ru-RU" sz="1300" b="0" i="0" u="none" strike="noStrike" dirty="0">
                         <a:effectLst/>
                         <a:latin typeface="Arial" panose="020B0604020202020204" pitchFamily="34" charset="0"/>
                       </a:endParaRPr>
@@ -15873,7 +16031,9 @@
                       <a:headEnd type="none" w="med" len="med"/>
                       <a:tailEnd type="none" w="med" len="med"/>
                     </a:lnB>
-                    <a:noFill/>
+                    <a:solidFill>
+                      <a:srgbClr val="92D050"/>
+                    </a:solidFill>
                   </a:tcPr>
                 </a:tc>
                 <a:tc>
@@ -15885,7 +16045,7 @@
                         <a:buNone/>
                       </a:pPr>
                       <a:r>
-                        <a:rPr lang="ru-RU" sz="1300" b="0" i="0" u="none" strike="noStrike">
+                        <a:rPr lang="ru-RU" sz="1300" b="0" i="0" u="none" strike="noStrike" dirty="0">
                           <a:solidFill>
                             <a:srgbClr val="000000"/>
                           </a:solidFill>
@@ -15894,7 +16054,7 @@
                         </a:rPr>
                         <a:t>0,98</a:t>
                       </a:r>
-                      <a:endParaRPr lang="ru-RU" sz="1300" b="0" i="0" u="none" strike="noStrike">
+                      <a:endParaRPr lang="ru-RU" sz="1300" b="0" i="0" u="none" strike="noStrike" dirty="0">
                         <a:effectLst/>
                         <a:latin typeface="Arial" panose="020B0604020202020204" pitchFamily="34" charset="0"/>
                       </a:endParaRPr>
@@ -15937,7 +16097,9 @@
                       <a:headEnd type="none" w="med" len="med"/>
                       <a:tailEnd type="none" w="med" len="med"/>
                     </a:lnB>
-                    <a:noFill/>
+                    <a:solidFill>
+                      <a:srgbClr val="92D050"/>
+                    </a:solidFill>
                   </a:tcPr>
                 </a:tc>
                 <a:tc>
@@ -15949,7 +16111,7 @@
                         <a:buNone/>
                       </a:pPr>
                       <a:r>
-                        <a:rPr lang="ru-RU" sz="1300" b="0" i="0" u="none" strike="noStrike">
+                        <a:rPr lang="ru-RU" sz="1300" b="0" i="0" u="none" strike="noStrike" dirty="0">
                           <a:solidFill>
                             <a:srgbClr val="000000"/>
                           </a:solidFill>
@@ -15958,7 +16120,7 @@
                         </a:rPr>
                         <a:t>1,00</a:t>
                       </a:r>
-                      <a:endParaRPr lang="ru-RU" sz="1300" b="0" i="0" u="none" strike="noStrike">
+                      <a:endParaRPr lang="ru-RU" sz="1300" b="0" i="0" u="none" strike="noStrike" dirty="0">
                         <a:effectLst/>
                         <a:latin typeface="Arial" panose="020B0604020202020204" pitchFamily="34" charset="0"/>
                       </a:endParaRPr>
@@ -16001,7 +16163,9 @@
                       <a:headEnd type="none" w="med" len="med"/>
                       <a:tailEnd type="none" w="med" len="med"/>
                     </a:lnB>
-                    <a:noFill/>
+                    <a:solidFill>
+                      <a:srgbClr val="92D050"/>
+                    </a:solidFill>
                   </a:tcPr>
                 </a:tc>
                 <a:extLst>
@@ -16082,7 +16246,9 @@
                       <a:headEnd type="none" w="med" len="med"/>
                       <a:tailEnd type="none" w="med" len="med"/>
                     </a:lnB>
-                    <a:noFill/>
+                    <a:solidFill>
+                      <a:srgbClr val="00B0F0"/>
+                    </a:solidFill>
                   </a:tcPr>
                 </a:tc>
                 <a:tc>
@@ -16146,7 +16312,9 @@
                       <a:headEnd type="none" w="med" len="med"/>
                       <a:tailEnd type="none" w="med" len="med"/>
                     </a:lnB>
-                    <a:noFill/>
+                    <a:solidFill>
+                      <a:srgbClr val="00B0F0"/>
+                    </a:solidFill>
                   </a:tcPr>
                 </a:tc>
                 <a:tc>
@@ -16158,7 +16326,7 @@
                         <a:buNone/>
                       </a:pPr>
                       <a:r>
-                        <a:rPr lang="ru-RU" sz="1300" b="0" i="0" u="none" strike="noStrike">
+                        <a:rPr lang="ru-RU" sz="1300" b="0" i="0" u="none" strike="noStrike" dirty="0">
                           <a:solidFill>
                             <a:srgbClr val="000000"/>
                           </a:solidFill>
@@ -16167,7 +16335,7 @@
                         </a:rPr>
                         <a:t>7,97</a:t>
                       </a:r>
-                      <a:endParaRPr lang="ru-RU" sz="1300" b="0" i="0" u="none" strike="noStrike">
+                      <a:endParaRPr lang="ru-RU" sz="1300" b="0" i="0" u="none" strike="noStrike" dirty="0">
                         <a:effectLst/>
                         <a:latin typeface="Arial" panose="020B0604020202020204" pitchFamily="34" charset="0"/>
                       </a:endParaRPr>
@@ -16210,7 +16378,9 @@
                       <a:headEnd type="none" w="med" len="med"/>
                       <a:tailEnd type="none" w="med" len="med"/>
                     </a:lnB>
-                    <a:noFill/>
+                    <a:solidFill>
+                      <a:srgbClr val="00B0F0"/>
+                    </a:solidFill>
                   </a:tcPr>
                 </a:tc>
                 <a:tc>
@@ -16274,7 +16444,9 @@
                       <a:headEnd type="none" w="med" len="med"/>
                       <a:tailEnd type="none" w="med" len="med"/>
                     </a:lnB>
-                    <a:noFill/>
+                    <a:solidFill>
+                      <a:srgbClr val="00B0F0"/>
+                    </a:solidFill>
                   </a:tcPr>
                 </a:tc>
                 <a:tc>
@@ -16286,7 +16458,7 @@
                         <a:buNone/>
                       </a:pPr>
                       <a:r>
-                        <a:rPr lang="ru-RU" sz="1300" b="0" i="0" u="none" strike="noStrike">
+                        <a:rPr lang="ru-RU" sz="1300" b="0" i="0" u="none" strike="noStrike" dirty="0">
                           <a:solidFill>
                             <a:srgbClr val="000000"/>
                           </a:solidFill>
@@ -16295,7 +16467,7 @@
                         </a:rPr>
                         <a:t>-</a:t>
                       </a:r>
-                      <a:endParaRPr lang="ru-RU" sz="1300" b="0" i="0" u="none" strike="noStrike">
+                      <a:endParaRPr lang="ru-RU" sz="1300" b="0" i="0" u="none" strike="noStrike" dirty="0">
                         <a:effectLst/>
                         <a:latin typeface="Arial" panose="020B0604020202020204" pitchFamily="34" charset="0"/>
                       </a:endParaRPr>
@@ -16338,7 +16510,9 @@
                       <a:headEnd type="none" w="med" len="med"/>
                       <a:tailEnd type="none" w="med" len="med"/>
                     </a:lnB>
-                    <a:noFill/>
+                    <a:solidFill>
+                      <a:srgbClr val="00B0F0"/>
+                    </a:solidFill>
                   </a:tcPr>
                 </a:tc>
                 <a:extLst>
@@ -16347,7 +16521,7 @@
                   </a:ext>
                 </a:extLst>
               </a:tr>
-              <a:tr h="171177">
+              <a:tr h="0">
                 <a:tc>
                   <a:txBody>
                     <a:bodyPr/>
@@ -16357,7 +16531,7 @@
                         <a:buNone/>
                       </a:pPr>
                       <a:r>
-                        <a:rPr lang="ru-RU" sz="1300" b="0" i="0" u="none" strike="noStrike">
+                        <a:rPr lang="ru-RU" sz="1300" b="0" i="0" u="none" strike="noStrike" dirty="0">
                           <a:solidFill>
                             <a:srgbClr val="000000"/>
                           </a:solidFill>
@@ -16367,7 +16541,7 @@
                         <a:t>Фото_7</a:t>
                       </a:r>
                       <a:r>
-                        <a:rPr lang="en-US" sz="1300" b="0" i="0" u="none" strike="noStrike">
+                        <a:rPr lang="en-US" sz="1300" b="0" i="0" u="none" strike="noStrike" dirty="0">
                           <a:solidFill>
                             <a:srgbClr val="000000"/>
                           </a:solidFill>
@@ -16376,7 +16550,7 @@
                         </a:rPr>
                         <a:t>z.jpg</a:t>
                       </a:r>
-                      <a:endParaRPr lang="en-US" sz="1300" b="0" i="0" u="none" strike="noStrike">
+                      <a:endParaRPr lang="en-US" sz="1300" b="0" i="0" u="none" strike="noStrike" dirty="0">
                         <a:effectLst/>
                         <a:latin typeface="Arial" panose="020B0604020202020204" pitchFamily="34" charset="0"/>
                       </a:endParaRPr>
@@ -16419,7 +16593,9 @@
                       <a:headEnd type="none" w="med" len="med"/>
                       <a:tailEnd type="none" w="med" len="med"/>
                     </a:lnB>
-                    <a:noFill/>
+                    <a:solidFill>
+                      <a:srgbClr val="00B0F0"/>
+                    </a:solidFill>
                   </a:tcPr>
                 </a:tc>
                 <a:tc>
@@ -16431,7 +16607,7 @@
                         <a:buNone/>
                       </a:pPr>
                       <a:r>
-                        <a:rPr lang="ru-RU" sz="1300" b="0" i="0" u="none" strike="noStrike">
+                        <a:rPr lang="ru-RU" sz="1300" b="0" i="0" u="none" strike="noStrike" dirty="0">
                           <a:solidFill>
                             <a:srgbClr val="000000"/>
                           </a:solidFill>
@@ -16440,7 +16616,7 @@
                         </a:rPr>
                         <a:t>73,00</a:t>
                       </a:r>
-                      <a:endParaRPr lang="ru-RU" sz="1300" b="0" i="0" u="none" strike="noStrike">
+                      <a:endParaRPr lang="ru-RU" sz="1300" b="0" i="0" u="none" strike="noStrike" dirty="0">
                         <a:effectLst/>
                         <a:latin typeface="Arial" panose="020B0604020202020204" pitchFamily="34" charset="0"/>
                       </a:endParaRPr>
@@ -16483,7 +16659,9 @@
                       <a:headEnd type="none" w="med" len="med"/>
                       <a:tailEnd type="none" w="med" len="med"/>
                     </a:lnB>
-                    <a:noFill/>
+                    <a:solidFill>
+                      <a:srgbClr val="00B0F0"/>
+                    </a:solidFill>
                   </a:tcPr>
                 </a:tc>
                 <a:tc>
@@ -16495,7 +16673,7 @@
                         <a:buNone/>
                       </a:pPr>
                       <a:r>
-                        <a:rPr lang="ru-RU" sz="1300" b="0" i="0" u="none" strike="noStrike">
+                        <a:rPr lang="ru-RU" sz="1300" b="0" i="0" u="none" strike="noStrike" dirty="0">
                           <a:solidFill>
                             <a:srgbClr val="000000"/>
                           </a:solidFill>
@@ -16504,7 +16682,7 @@
                         </a:rPr>
                         <a:t>7,97</a:t>
                       </a:r>
-                      <a:endParaRPr lang="ru-RU" sz="1300" b="0" i="0" u="none" strike="noStrike">
+                      <a:endParaRPr lang="ru-RU" sz="1300" b="0" i="0" u="none" strike="noStrike" dirty="0">
                         <a:effectLst/>
                         <a:latin typeface="Arial" panose="020B0604020202020204" pitchFamily="34" charset="0"/>
                       </a:endParaRPr>
@@ -16547,7 +16725,9 @@
                       <a:headEnd type="none" w="med" len="med"/>
                       <a:tailEnd type="none" w="med" len="med"/>
                     </a:lnB>
-                    <a:noFill/>
+                    <a:solidFill>
+                      <a:srgbClr val="00B0F0"/>
+                    </a:solidFill>
                   </a:tcPr>
                 </a:tc>
                 <a:tc>
@@ -16559,7 +16739,7 @@
                         <a:buNone/>
                       </a:pPr>
                       <a:r>
-                        <a:rPr lang="ru-RU" sz="1300" b="0" i="0" u="none" strike="noStrike">
+                        <a:rPr lang="ru-RU" sz="1300" b="0" i="0" u="none" strike="noStrike" dirty="0">
                           <a:solidFill>
                             <a:srgbClr val="000000"/>
                           </a:solidFill>
@@ -16568,7 +16748,7 @@
                         </a:rPr>
                         <a:t>1,00</a:t>
                       </a:r>
-                      <a:endParaRPr lang="ru-RU" sz="1300" b="0" i="0" u="none" strike="noStrike">
+                      <a:endParaRPr lang="ru-RU" sz="1300" b="0" i="0" u="none" strike="noStrike" dirty="0">
                         <a:effectLst/>
                         <a:latin typeface="Arial" panose="020B0604020202020204" pitchFamily="34" charset="0"/>
                       </a:endParaRPr>
@@ -16611,7 +16791,9 @@
                       <a:headEnd type="none" w="med" len="med"/>
                       <a:tailEnd type="none" w="med" len="med"/>
                     </a:lnB>
-                    <a:noFill/>
+                    <a:solidFill>
+                      <a:srgbClr val="00B0F0"/>
+                    </a:solidFill>
                   </a:tcPr>
                 </a:tc>
                 <a:tc>
@@ -16623,7 +16805,7 @@
                         <a:buNone/>
                       </a:pPr>
                       <a:r>
-                        <a:rPr lang="ru-RU" sz="1300" b="0" i="0" u="none" strike="noStrike">
+                        <a:rPr lang="ru-RU" sz="1300" b="0" i="0" u="none" strike="noStrike" dirty="0">
                           <a:solidFill>
                             <a:srgbClr val="000000"/>
                           </a:solidFill>
@@ -16632,7 +16814,7 @@
                         </a:rPr>
                         <a:t>1,00</a:t>
                       </a:r>
-                      <a:endParaRPr lang="ru-RU" sz="1300" b="0" i="0" u="none" strike="noStrike">
+                      <a:endParaRPr lang="ru-RU" sz="1300" b="0" i="0" u="none" strike="noStrike" dirty="0">
                         <a:effectLst/>
                         <a:latin typeface="Arial" panose="020B0604020202020204" pitchFamily="34" charset="0"/>
                       </a:endParaRPr>
@@ -16675,7 +16857,9 @@
                       <a:headEnd type="none" w="med" len="med"/>
                       <a:tailEnd type="none" w="med" len="med"/>
                     </a:lnB>
-                    <a:noFill/>
+                    <a:solidFill>
+                      <a:srgbClr val="00B0F0"/>
+                    </a:solidFill>
                   </a:tcPr>
                 </a:tc>
                 <a:extLst>
@@ -16756,7 +16940,9 @@
                       <a:headEnd type="none" w="med" len="med"/>
                       <a:tailEnd type="none" w="med" len="med"/>
                     </a:lnB>
-                    <a:noFill/>
+                    <a:solidFill>
+                      <a:srgbClr val="00B0F0"/>
+                    </a:solidFill>
                   </a:tcPr>
                 </a:tc>
                 <a:tc>
@@ -16820,7 +17006,9 @@
                       <a:headEnd type="none" w="med" len="med"/>
                       <a:tailEnd type="none" w="med" len="med"/>
                     </a:lnB>
-                    <a:noFill/>
+                    <a:solidFill>
+                      <a:srgbClr val="00B0F0"/>
+                    </a:solidFill>
                   </a:tcPr>
                 </a:tc>
                 <a:tc>
@@ -16832,7 +17020,7 @@
                         <a:buNone/>
                       </a:pPr>
                       <a:r>
-                        <a:rPr lang="ru-RU" sz="1300" b="0" i="0" u="none" strike="noStrike">
+                        <a:rPr lang="ru-RU" sz="1300" b="0" i="0" u="none" strike="noStrike" dirty="0">
                           <a:solidFill>
                             <a:srgbClr val="000000"/>
                           </a:solidFill>
@@ -16841,7 +17029,7 @@
                         </a:rPr>
                         <a:t>8,00</a:t>
                       </a:r>
-                      <a:endParaRPr lang="ru-RU" sz="1300" b="0" i="0" u="none" strike="noStrike">
+                      <a:endParaRPr lang="ru-RU" sz="1300" b="0" i="0" u="none" strike="noStrike" dirty="0">
                         <a:effectLst/>
                         <a:latin typeface="Arial" panose="020B0604020202020204" pitchFamily="34" charset="0"/>
                       </a:endParaRPr>
@@ -16884,7 +17072,9 @@
                       <a:headEnd type="none" w="med" len="med"/>
                       <a:tailEnd type="none" w="med" len="med"/>
                     </a:lnB>
-                    <a:noFill/>
+                    <a:solidFill>
+                      <a:srgbClr val="00B0F0"/>
+                    </a:solidFill>
                   </a:tcPr>
                 </a:tc>
                 <a:tc>
@@ -16896,7 +17086,7 @@
                         <a:buNone/>
                       </a:pPr>
                       <a:r>
-                        <a:rPr lang="ru-RU" sz="1300" b="0" i="0" u="none" strike="noStrike">
+                        <a:rPr lang="ru-RU" sz="1300" b="0" i="0" u="none" strike="noStrike" dirty="0">
                           <a:solidFill>
                             <a:srgbClr val="000000"/>
                           </a:solidFill>
@@ -16905,7 +17095,7 @@
                         </a:rPr>
                         <a:t>-</a:t>
                       </a:r>
-                      <a:endParaRPr lang="ru-RU" sz="1300" b="0" i="0" u="none" strike="noStrike">
+                      <a:endParaRPr lang="ru-RU" sz="1300" b="0" i="0" u="none" strike="noStrike" dirty="0">
                         <a:effectLst/>
                         <a:latin typeface="Arial" panose="020B0604020202020204" pitchFamily="34" charset="0"/>
                       </a:endParaRPr>
@@ -16948,7 +17138,9 @@
                       <a:headEnd type="none" w="med" len="med"/>
                       <a:tailEnd type="none" w="med" len="med"/>
                     </a:lnB>
-                    <a:noFill/>
+                    <a:solidFill>
+                      <a:srgbClr val="00B0F0"/>
+                    </a:solidFill>
                   </a:tcPr>
                 </a:tc>
                 <a:tc>
@@ -16960,7 +17152,7 @@
                         <a:buNone/>
                       </a:pPr>
                       <a:r>
-                        <a:rPr lang="ru-RU" sz="1300" b="0" i="0" u="none" strike="noStrike">
+                        <a:rPr lang="ru-RU" sz="1300" b="0" i="0" u="none" strike="noStrike" dirty="0">
                           <a:solidFill>
                             <a:srgbClr val="000000"/>
                           </a:solidFill>
@@ -16969,7 +17161,7 @@
                         </a:rPr>
                         <a:t>-</a:t>
                       </a:r>
-                      <a:endParaRPr lang="ru-RU" sz="1300" b="0" i="0" u="none" strike="noStrike">
+                      <a:endParaRPr lang="ru-RU" sz="1300" b="0" i="0" u="none" strike="noStrike" dirty="0">
                         <a:effectLst/>
                         <a:latin typeface="Arial" panose="020B0604020202020204" pitchFamily="34" charset="0"/>
                       </a:endParaRPr>
@@ -17012,7 +17204,9 @@
                       <a:headEnd type="none" w="med" len="med"/>
                       <a:tailEnd type="none" w="med" len="med"/>
                     </a:lnB>
-                    <a:noFill/>
+                    <a:solidFill>
+                      <a:srgbClr val="00B0F0"/>
+                    </a:solidFill>
                   </a:tcPr>
                 </a:tc>
                 <a:extLst>
@@ -17093,7 +17287,9 @@
                       <a:headEnd type="none" w="med" len="med"/>
                       <a:tailEnd type="none" w="med" len="med"/>
                     </a:lnB>
-                    <a:noFill/>
+                    <a:solidFill>
+                      <a:srgbClr val="00B0F0"/>
+                    </a:solidFill>
                   </a:tcPr>
                 </a:tc>
                 <a:tc>
@@ -17157,7 +17353,9 @@
                       <a:headEnd type="none" w="med" len="med"/>
                       <a:tailEnd type="none" w="med" len="med"/>
                     </a:lnB>
-                    <a:noFill/>
+                    <a:solidFill>
+                      <a:srgbClr val="00B0F0"/>
+                    </a:solidFill>
                   </a:tcPr>
                 </a:tc>
                 <a:tc>
@@ -17221,7 +17419,9 @@
                       <a:headEnd type="none" w="med" len="med"/>
                       <a:tailEnd type="none" w="med" len="med"/>
                     </a:lnB>
-                    <a:noFill/>
+                    <a:solidFill>
+                      <a:srgbClr val="00B0F0"/>
+                    </a:solidFill>
                   </a:tcPr>
                 </a:tc>
                 <a:tc>
@@ -17233,7 +17433,7 @@
                         <a:buNone/>
                       </a:pPr>
                       <a:r>
-                        <a:rPr lang="ru-RU" sz="1300" b="0" i="0" u="none" strike="noStrike">
+                        <a:rPr lang="ru-RU" sz="1300" b="0" i="0" u="none" strike="noStrike" dirty="0">
                           <a:solidFill>
                             <a:srgbClr val="000000"/>
                           </a:solidFill>
@@ -17242,7 +17442,7 @@
                         </a:rPr>
                         <a:t>1,03</a:t>
                       </a:r>
-                      <a:endParaRPr lang="ru-RU" sz="1300" b="0" i="0" u="none" strike="noStrike">
+                      <a:endParaRPr lang="ru-RU" sz="1300" b="0" i="0" u="none" strike="noStrike" dirty="0">
                         <a:effectLst/>
                         <a:latin typeface="Arial" panose="020B0604020202020204" pitchFamily="34" charset="0"/>
                       </a:endParaRPr>
@@ -17285,7 +17485,9 @@
                       <a:headEnd type="none" w="med" len="med"/>
                       <a:tailEnd type="none" w="med" len="med"/>
                     </a:lnB>
-                    <a:noFill/>
+                    <a:solidFill>
+                      <a:srgbClr val="00B0F0"/>
+                    </a:solidFill>
                   </a:tcPr>
                 </a:tc>
                 <a:tc>
@@ -17297,7 +17499,7 @@
                         <a:buNone/>
                       </a:pPr>
                       <a:r>
-                        <a:rPr lang="ru-RU" sz="1300" b="0" i="0" u="none" strike="noStrike">
+                        <a:rPr lang="ru-RU" sz="1300" b="0" i="0" u="none" strike="noStrike" dirty="0">
                           <a:solidFill>
                             <a:srgbClr val="000000"/>
                           </a:solidFill>
@@ -17306,7 +17508,7 @@
                         </a:rPr>
                         <a:t>1,00</a:t>
                       </a:r>
-                      <a:endParaRPr lang="ru-RU" sz="1300" b="0" i="0" u="none" strike="noStrike">
+                      <a:endParaRPr lang="ru-RU" sz="1300" b="0" i="0" u="none" strike="noStrike" dirty="0">
                         <a:effectLst/>
                         <a:latin typeface="Arial" panose="020B0604020202020204" pitchFamily="34" charset="0"/>
                       </a:endParaRPr>
@@ -17349,7 +17551,9 @@
                       <a:headEnd type="none" w="med" len="med"/>
                       <a:tailEnd type="none" w="med" len="med"/>
                     </a:lnB>
-                    <a:noFill/>
+                    <a:solidFill>
+                      <a:srgbClr val="00B0F0"/>
+                    </a:solidFill>
                   </a:tcPr>
                 </a:tc>
                 <a:extLst>
@@ -17368,7 +17572,7 @@
                         <a:buNone/>
                       </a:pPr>
                       <a:r>
-                        <a:rPr lang="ru-RU" sz="1300" b="0" i="0" u="none" strike="noStrike">
+                        <a:rPr lang="ru-RU" sz="1300" b="0" i="0" u="none" strike="noStrike" dirty="0">
                           <a:solidFill>
                             <a:srgbClr val="000000"/>
                           </a:solidFill>
@@ -17378,7 +17582,7 @@
                         <a:t>Сказка.</a:t>
                       </a:r>
                       <a:r>
-                        <a:rPr lang="en-US" sz="1300" b="0" i="0" u="none" strike="noStrike">
+                        <a:rPr lang="en-US" sz="1300" b="0" i="0" u="none" strike="noStrike" dirty="0">
                           <a:solidFill>
                             <a:srgbClr val="000000"/>
                           </a:solidFill>
@@ -17387,7 +17591,7 @@
                         </a:rPr>
                         <a:t>doc</a:t>
                       </a:r>
-                      <a:endParaRPr lang="en-US" sz="1300" b="0" i="0" u="none" strike="noStrike">
+                      <a:endParaRPr lang="en-US" sz="1300" b="0" i="0" u="none" strike="noStrike" dirty="0">
                         <a:effectLst/>
                         <a:latin typeface="Arial" panose="020B0604020202020204" pitchFamily="34" charset="0"/>
                       </a:endParaRPr>
@@ -17430,7 +17634,9 @@
                       <a:headEnd type="none" w="med" len="med"/>
                       <a:tailEnd type="none" w="med" len="med"/>
                     </a:lnB>
-                    <a:noFill/>
+                    <a:solidFill>
+                      <a:srgbClr val="7030A0"/>
+                    </a:solidFill>
                   </a:tcPr>
                 </a:tc>
                 <a:tc>
@@ -17442,7 +17648,7 @@
                         <a:buNone/>
                       </a:pPr>
                       <a:r>
-                        <a:rPr lang="ru-RU" sz="1300" b="0" i="0" u="none" strike="noStrike">
+                        <a:rPr lang="ru-RU" sz="1300" b="0" i="0" u="none" strike="noStrike" dirty="0">
                           <a:solidFill>
                             <a:srgbClr val="000000"/>
                           </a:solidFill>
@@ -17451,7 +17657,7 @@
                         </a:rPr>
                         <a:t>16,00</a:t>
                       </a:r>
-                      <a:endParaRPr lang="ru-RU" sz="1300" b="0" i="0" u="none" strike="noStrike">
+                      <a:endParaRPr lang="ru-RU" sz="1300" b="0" i="0" u="none" strike="noStrike" dirty="0">
                         <a:effectLst/>
                         <a:latin typeface="Arial" panose="020B0604020202020204" pitchFamily="34" charset="0"/>
                       </a:endParaRPr>
@@ -17494,7 +17700,9 @@
                       <a:headEnd type="none" w="med" len="med"/>
                       <a:tailEnd type="none" w="med" len="med"/>
                     </a:lnB>
-                    <a:noFill/>
+                    <a:solidFill>
+                      <a:srgbClr val="7030A0"/>
+                    </a:solidFill>
                   </a:tcPr>
                 </a:tc>
                 <a:tc>
@@ -17558,7 +17766,9 @@
                       <a:headEnd type="none" w="med" len="med"/>
                       <a:tailEnd type="none" w="med" len="med"/>
                     </a:lnB>
-                    <a:noFill/>
+                    <a:solidFill>
+                      <a:srgbClr val="7030A0"/>
+                    </a:solidFill>
                   </a:tcPr>
                 </a:tc>
                 <a:tc>
@@ -17622,7 +17832,9 @@
                       <a:headEnd type="none" w="med" len="med"/>
                       <a:tailEnd type="none" w="med" len="med"/>
                     </a:lnB>
-                    <a:noFill/>
+                    <a:solidFill>
+                      <a:srgbClr val="7030A0"/>
+                    </a:solidFill>
                   </a:tcPr>
                 </a:tc>
                 <a:tc>
@@ -17686,7 +17898,9 @@
                       <a:headEnd type="none" w="med" len="med"/>
                       <a:tailEnd type="none" w="med" len="med"/>
                     </a:lnB>
-                    <a:noFill/>
+                    <a:solidFill>
+                      <a:srgbClr val="7030A0"/>
+                    </a:solidFill>
                   </a:tcPr>
                 </a:tc>
                 <a:extLst>
@@ -17705,7 +17919,7 @@
                         <a:buNone/>
                       </a:pPr>
                       <a:r>
-                        <a:rPr lang="ru-RU" sz="1300" b="0" i="0" u="none" strike="noStrike">
+                        <a:rPr lang="ru-RU" sz="1300" b="0" i="0" u="none" strike="noStrike" dirty="0">
                           <a:solidFill>
                             <a:srgbClr val="000000"/>
                           </a:solidFill>
@@ -17715,7 +17929,7 @@
                         <a:t>Сказка_7</a:t>
                       </a:r>
                       <a:r>
-                        <a:rPr lang="en-US" sz="1300" b="0" i="0" u="none" strike="noStrike">
+                        <a:rPr lang="en-US" sz="1300" b="0" i="0" u="none" strike="noStrike" dirty="0">
                           <a:solidFill>
                             <a:srgbClr val="000000"/>
                           </a:solidFill>
@@ -17724,7 +17938,7 @@
                         </a:rPr>
                         <a:t>z.doc</a:t>
                       </a:r>
-                      <a:endParaRPr lang="en-US" sz="1300" b="0" i="0" u="none" strike="noStrike">
+                      <a:endParaRPr lang="en-US" sz="1300" b="0" i="0" u="none" strike="noStrike" dirty="0">
                         <a:effectLst/>
                         <a:latin typeface="Arial" panose="020B0604020202020204" pitchFamily="34" charset="0"/>
                       </a:endParaRPr>
@@ -17767,7 +17981,9 @@
                       <a:headEnd type="none" w="med" len="med"/>
                       <a:tailEnd type="none" w="med" len="med"/>
                     </a:lnB>
-                    <a:noFill/>
+                    <a:solidFill>
+                      <a:srgbClr val="7030A0"/>
+                    </a:solidFill>
                   </a:tcPr>
                 </a:tc>
                 <a:tc>
@@ -17831,7 +18047,9 @@
                       <a:headEnd type="none" w="med" len="med"/>
                       <a:tailEnd type="none" w="med" len="med"/>
                     </a:lnB>
-                    <a:noFill/>
+                    <a:solidFill>
+                      <a:srgbClr val="7030A0"/>
+                    </a:solidFill>
                   </a:tcPr>
                 </a:tc>
                 <a:tc>
@@ -17895,7 +18113,9 @@
                       <a:headEnd type="none" w="med" len="med"/>
                       <a:tailEnd type="none" w="med" len="med"/>
                     </a:lnB>
-                    <a:noFill/>
+                    <a:solidFill>
+                      <a:srgbClr val="7030A0"/>
+                    </a:solidFill>
                   </a:tcPr>
                 </a:tc>
                 <a:tc>
@@ -17959,7 +18179,9 @@
                       <a:headEnd type="none" w="med" len="med"/>
                       <a:tailEnd type="none" w="med" len="med"/>
                     </a:lnB>
-                    <a:noFill/>
+                    <a:solidFill>
+                      <a:srgbClr val="7030A0"/>
+                    </a:solidFill>
                   </a:tcPr>
                 </a:tc>
                 <a:tc>
@@ -18023,7 +18245,9 @@
                       <a:headEnd type="none" w="med" len="med"/>
                       <a:tailEnd type="none" w="med" len="med"/>
                     </a:lnB>
-                    <a:noFill/>
+                    <a:solidFill>
+                      <a:srgbClr val="7030A0"/>
+                    </a:solidFill>
                   </a:tcPr>
                 </a:tc>
                 <a:extLst>
@@ -18104,7 +18328,9 @@
                       <a:headEnd type="none" w="med" len="med"/>
                       <a:tailEnd type="none" w="med" len="med"/>
                     </a:lnB>
-                    <a:noFill/>
+                    <a:solidFill>
+                      <a:srgbClr val="7030A0"/>
+                    </a:solidFill>
                   </a:tcPr>
                 </a:tc>
                 <a:tc>
@@ -18116,7 +18342,7 @@
                         <a:buNone/>
                       </a:pPr>
                       <a:r>
-                        <a:rPr lang="ru-RU" sz="1300" b="0" i="0" u="none" strike="noStrike">
+                        <a:rPr lang="ru-RU" sz="1300" b="0" i="0" u="none" strike="noStrike" dirty="0">
                           <a:solidFill>
                             <a:srgbClr val="000000"/>
                           </a:solidFill>
@@ -18125,7 +18351,7 @@
                         </a:rPr>
                         <a:t>4,00</a:t>
                       </a:r>
-                      <a:endParaRPr lang="ru-RU" sz="1300" b="0" i="0" u="none" strike="noStrike">
+                      <a:endParaRPr lang="ru-RU" sz="1300" b="0" i="0" u="none" strike="noStrike" dirty="0">
                         <a:effectLst/>
                         <a:latin typeface="Arial" panose="020B0604020202020204" pitchFamily="34" charset="0"/>
                       </a:endParaRPr>
@@ -18168,7 +18394,9 @@
                       <a:headEnd type="none" w="med" len="med"/>
                       <a:tailEnd type="none" w="med" len="med"/>
                     </a:lnB>
-                    <a:noFill/>
+                    <a:solidFill>
+                      <a:srgbClr val="7030A0"/>
+                    </a:solidFill>
                   </a:tcPr>
                 </a:tc>
                 <a:tc>
@@ -18180,7 +18408,7 @@
                         <a:buNone/>
                       </a:pPr>
                       <a:r>
-                        <a:rPr lang="ru-RU" sz="1300" b="0" i="0" u="none" strike="noStrike">
+                        <a:rPr lang="ru-RU" sz="1300" b="0" i="0" u="none" strike="noStrike" dirty="0">
                           <a:solidFill>
                             <a:srgbClr val="000000"/>
                           </a:solidFill>
@@ -18189,7 +18417,7 @@
                         </a:rPr>
                         <a:t>4,13</a:t>
                       </a:r>
-                      <a:endParaRPr lang="ru-RU" sz="1300" b="0" i="0" u="none" strike="noStrike">
+                      <a:endParaRPr lang="ru-RU" sz="1300" b="0" i="0" u="none" strike="noStrike" dirty="0">
                         <a:effectLst/>
                         <a:latin typeface="Arial" panose="020B0604020202020204" pitchFamily="34" charset="0"/>
                       </a:endParaRPr>
@@ -18232,7 +18460,9 @@
                       <a:headEnd type="none" w="med" len="med"/>
                       <a:tailEnd type="none" w="med" len="med"/>
                     </a:lnB>
-                    <a:noFill/>
+                    <a:solidFill>
+                      <a:srgbClr val="7030A0"/>
+                    </a:solidFill>
                   </a:tcPr>
                 </a:tc>
                 <a:tc>
@@ -18296,7 +18526,9 @@
                       <a:headEnd type="none" w="med" len="med"/>
                       <a:tailEnd type="none" w="med" len="med"/>
                     </a:lnB>
-                    <a:noFill/>
+                    <a:solidFill>
+                      <a:srgbClr val="7030A0"/>
+                    </a:solidFill>
                   </a:tcPr>
                 </a:tc>
                 <a:tc>
@@ -18360,7 +18592,9 @@
                       <a:headEnd type="none" w="med" len="med"/>
                       <a:tailEnd type="none" w="med" len="med"/>
                     </a:lnB>
-                    <a:noFill/>
+                    <a:solidFill>
+                      <a:srgbClr val="7030A0"/>
+                    </a:solidFill>
                   </a:tcPr>
                 </a:tc>
                 <a:extLst>
@@ -18441,7 +18675,9 @@
                       <a:headEnd type="none" w="med" len="med"/>
                       <a:tailEnd type="none" w="med" len="med"/>
                     </a:lnB>
-                    <a:noFill/>
+                    <a:solidFill>
+                      <a:srgbClr val="7030A0"/>
+                    </a:solidFill>
                   </a:tcPr>
                 </a:tc>
                 <a:tc>
@@ -18505,7 +18741,9 @@
                       <a:headEnd type="none" w="med" len="med"/>
                       <a:tailEnd type="none" w="med" len="med"/>
                     </a:lnB>
-                    <a:noFill/>
+                    <a:solidFill>
+                      <a:srgbClr val="7030A0"/>
+                    </a:solidFill>
                   </a:tcPr>
                 </a:tc>
                 <a:tc>
@@ -18569,7 +18807,9 @@
                       <a:headEnd type="none" w="med" len="med"/>
                       <a:tailEnd type="none" w="med" len="med"/>
                     </a:lnB>
-                    <a:noFill/>
+                    <a:solidFill>
+                      <a:srgbClr val="7030A0"/>
+                    </a:solidFill>
                   </a:tcPr>
                 </a:tc>
                 <a:tc>
@@ -18581,7 +18821,7 @@
                         <a:buNone/>
                       </a:pPr>
                       <a:r>
-                        <a:rPr lang="ru-RU" sz="1300" b="0" i="0" u="none" strike="noStrike">
+                        <a:rPr lang="ru-RU" sz="1300" b="0" i="0" u="none" strike="noStrike" dirty="0">
                           <a:solidFill>
                             <a:srgbClr val="000000"/>
                           </a:solidFill>
@@ -18590,7 +18830,7 @@
                         </a:rPr>
                         <a:t>0,50</a:t>
                       </a:r>
-                      <a:endParaRPr lang="ru-RU" sz="1300" b="0" i="0" u="none" strike="noStrike">
+                      <a:endParaRPr lang="ru-RU" sz="1300" b="0" i="0" u="none" strike="noStrike" dirty="0">
                         <a:effectLst/>
                         <a:latin typeface="Arial" panose="020B0604020202020204" pitchFamily="34" charset="0"/>
                       </a:endParaRPr>
@@ -18633,7 +18873,9 @@
                       <a:headEnd type="none" w="med" len="med"/>
                       <a:tailEnd type="none" w="med" len="med"/>
                     </a:lnB>
-                    <a:noFill/>
+                    <a:solidFill>
+                      <a:srgbClr val="7030A0"/>
+                    </a:solidFill>
                   </a:tcPr>
                 </a:tc>
                 <a:tc>
@@ -18645,7 +18887,7 @@
                         <a:buNone/>
                       </a:pPr>
                       <a:r>
-                        <a:rPr lang="ru-RU" sz="1300" b="0" i="0" u="none" strike="noStrike">
+                        <a:rPr lang="ru-RU" sz="1300" b="0" i="0" u="none" strike="noStrike" dirty="0">
                           <a:solidFill>
                             <a:srgbClr val="000000"/>
                           </a:solidFill>
@@ -18654,7 +18896,7 @@
                         </a:rPr>
                         <a:t>1,88</a:t>
                       </a:r>
-                      <a:endParaRPr lang="ru-RU" sz="1300" b="0" i="0" u="none" strike="noStrike">
+                      <a:endParaRPr lang="ru-RU" sz="1300" b="0" i="0" u="none" strike="noStrike" dirty="0">
                         <a:effectLst/>
                         <a:latin typeface="Arial" panose="020B0604020202020204" pitchFamily="34" charset="0"/>
                       </a:endParaRPr>
@@ -18697,7 +18939,9 @@
                       <a:headEnd type="none" w="med" len="med"/>
                       <a:tailEnd type="none" w="med" len="med"/>
                     </a:lnB>
-                    <a:noFill/>
+                    <a:solidFill>
+                      <a:srgbClr val="7030A0"/>
+                    </a:solidFill>
                   </a:tcPr>
                 </a:tc>
                 <a:extLst>
@@ -18716,7 +18960,7 @@
                         <a:buNone/>
                       </a:pPr>
                       <a:r>
-                        <a:rPr lang="ru-RU" sz="1300" b="0" i="0" u="none" strike="noStrike">
+                        <a:rPr lang="ru-RU" sz="1300" b="0" i="0" u="none" strike="noStrike" dirty="0">
                           <a:solidFill>
                             <a:srgbClr val="000000"/>
                           </a:solidFill>
@@ -18726,7 +18970,7 @@
                         <a:t>Таблица.</a:t>
                       </a:r>
                       <a:r>
-                        <a:rPr lang="en-US" sz="1300" b="0" i="0" u="none" strike="noStrike">
+                        <a:rPr lang="en-US" sz="1300" b="0" i="0" u="none" strike="noStrike" dirty="0">
                           <a:solidFill>
                             <a:srgbClr val="000000"/>
                           </a:solidFill>
@@ -18735,7 +18979,7 @@
                         </a:rPr>
                         <a:t>xlsx</a:t>
                       </a:r>
-                      <a:endParaRPr lang="en-US" sz="1300" b="0" i="0" u="none" strike="noStrike">
+                      <a:endParaRPr lang="en-US" sz="1300" b="0" i="0" u="none" strike="noStrike" dirty="0">
                         <a:effectLst/>
                         <a:latin typeface="Arial" panose="020B0604020202020204" pitchFamily="34" charset="0"/>
                       </a:endParaRPr>
@@ -18778,7 +19022,9 @@
                       <a:headEnd type="none" w="med" len="med"/>
                       <a:tailEnd type="none" w="med" len="med"/>
                     </a:lnB>
-                    <a:noFill/>
+                    <a:solidFill>
+                      <a:srgbClr val="0070C0"/>
+                    </a:solidFill>
                   </a:tcPr>
                 </a:tc>
                 <a:tc>
@@ -18842,7 +19088,9 @@
                       <a:headEnd type="none" w="med" len="med"/>
                       <a:tailEnd type="none" w="med" len="med"/>
                     </a:lnB>
-                    <a:noFill/>
+                    <a:solidFill>
+                      <a:srgbClr val="0070C0"/>
+                    </a:solidFill>
                   </a:tcPr>
                 </a:tc>
                 <a:tc>
@@ -18906,7 +19154,9 @@
                       <a:headEnd type="none" w="med" len="med"/>
                       <a:tailEnd type="none" w="med" len="med"/>
                     </a:lnB>
-                    <a:noFill/>
+                    <a:solidFill>
+                      <a:srgbClr val="0070C0"/>
+                    </a:solidFill>
                   </a:tcPr>
                 </a:tc>
                 <a:tc>
@@ -18970,7 +19220,9 @@
                       <a:headEnd type="none" w="med" len="med"/>
                       <a:tailEnd type="none" w="med" len="med"/>
                     </a:lnB>
-                    <a:noFill/>
+                    <a:solidFill>
+                      <a:srgbClr val="0070C0"/>
+                    </a:solidFill>
                   </a:tcPr>
                 </a:tc>
                 <a:tc>
@@ -19034,7 +19286,9 @@
                       <a:headEnd type="none" w="med" len="med"/>
                       <a:tailEnd type="none" w="med" len="med"/>
                     </a:lnB>
-                    <a:noFill/>
+                    <a:solidFill>
+                      <a:srgbClr val="0070C0"/>
+                    </a:solidFill>
                   </a:tcPr>
                 </a:tc>
                 <a:extLst>
@@ -19053,7 +19307,7 @@
                         <a:buNone/>
                       </a:pPr>
                       <a:r>
-                        <a:rPr lang="ru-RU" sz="1300" b="0" i="0" u="none" strike="noStrike">
+                        <a:rPr lang="ru-RU" sz="1300" b="0" i="0" u="none" strike="noStrike" dirty="0">
                           <a:solidFill>
                             <a:srgbClr val="000000"/>
                           </a:solidFill>
@@ -19063,7 +19317,7 @@
                         <a:t>Таблица_7</a:t>
                       </a:r>
                       <a:r>
-                        <a:rPr lang="en-US" sz="1300" b="0" i="0" u="none" strike="noStrike">
+                        <a:rPr lang="en-US" sz="1300" b="0" i="0" u="none" strike="noStrike" dirty="0">
                           <a:solidFill>
                             <a:srgbClr val="000000"/>
                           </a:solidFill>
@@ -19072,7 +19326,7 @@
                         </a:rPr>
                         <a:t>z.xlsx</a:t>
                       </a:r>
-                      <a:endParaRPr lang="en-US" sz="1300" b="0" i="0" u="none" strike="noStrike">
+                      <a:endParaRPr lang="en-US" sz="1300" b="0" i="0" u="none" strike="noStrike" dirty="0">
                         <a:effectLst/>
                         <a:latin typeface="Arial" panose="020B0604020202020204" pitchFamily="34" charset="0"/>
                       </a:endParaRPr>
@@ -19115,7 +19369,9 @@
                       <a:headEnd type="none" w="med" len="med"/>
                       <a:tailEnd type="none" w="med" len="med"/>
                     </a:lnB>
-                    <a:noFill/>
+                    <a:solidFill>
+                      <a:srgbClr val="0070C0"/>
+                    </a:solidFill>
                   </a:tcPr>
                 </a:tc>
                 <a:tc>
@@ -19179,7 +19435,9 @@
                       <a:headEnd type="none" w="med" len="med"/>
                       <a:tailEnd type="none" w="med" len="med"/>
                     </a:lnB>
-                    <a:noFill/>
+                    <a:solidFill>
+                      <a:srgbClr val="0070C0"/>
+                    </a:solidFill>
                   </a:tcPr>
                 </a:tc>
                 <a:tc>
@@ -19243,7 +19501,9 @@
                       <a:headEnd type="none" w="med" len="med"/>
                       <a:tailEnd type="none" w="med" len="med"/>
                     </a:lnB>
-                    <a:noFill/>
+                    <a:solidFill>
+                      <a:srgbClr val="0070C0"/>
+                    </a:solidFill>
                   </a:tcPr>
                 </a:tc>
                 <a:tc>
@@ -19307,7 +19567,9 @@
                       <a:headEnd type="none" w="med" len="med"/>
                       <a:tailEnd type="none" w="med" len="med"/>
                     </a:lnB>
-                    <a:noFill/>
+                    <a:solidFill>
+                      <a:srgbClr val="0070C0"/>
+                    </a:solidFill>
                   </a:tcPr>
                 </a:tc>
                 <a:tc>
@@ -19371,7 +19633,9 @@
                       <a:headEnd type="none" w="med" len="med"/>
                       <a:tailEnd type="none" w="med" len="med"/>
                     </a:lnB>
-                    <a:noFill/>
+                    <a:solidFill>
+                      <a:srgbClr val="0070C0"/>
+                    </a:solidFill>
                   </a:tcPr>
                 </a:tc>
                 <a:extLst>
@@ -19452,7 +19716,9 @@
                       <a:headEnd type="none" w="med" len="med"/>
                       <a:tailEnd type="none" w="med" len="med"/>
                     </a:lnB>
-                    <a:noFill/>
+                    <a:solidFill>
+                      <a:srgbClr val="0070C0"/>
+                    </a:solidFill>
                   </a:tcPr>
                 </a:tc>
                 <a:tc>
@@ -19464,7 +19730,7 @@
                         <a:buNone/>
                       </a:pPr>
                       <a:r>
-                        <a:rPr lang="ru-RU" sz="1300" b="0" i="0" u="none" strike="noStrike">
+                        <a:rPr lang="ru-RU" sz="1300" b="0" i="0" u="none" strike="noStrike" dirty="0">
                           <a:solidFill>
                             <a:srgbClr val="000000"/>
                           </a:solidFill>
@@ -19473,7 +19739,7 @@
                         </a:rPr>
                         <a:t>10,00</a:t>
                       </a:r>
-                      <a:endParaRPr lang="ru-RU" sz="1300" b="0" i="0" u="none" strike="noStrike">
+                      <a:endParaRPr lang="ru-RU" sz="1300" b="0" i="0" u="none" strike="noStrike" dirty="0">
                         <a:effectLst/>
                         <a:latin typeface="Arial" panose="020B0604020202020204" pitchFamily="34" charset="0"/>
                       </a:endParaRPr>
@@ -19516,7 +19782,9 @@
                       <a:headEnd type="none" w="med" len="med"/>
                       <a:tailEnd type="none" w="med" len="med"/>
                     </a:lnB>
-                    <a:noFill/>
+                    <a:solidFill>
+                      <a:srgbClr val="0070C0"/>
+                    </a:solidFill>
                   </a:tcPr>
                 </a:tc>
                 <a:tc>
@@ -19528,7 +19796,7 @@
                         <a:buNone/>
                       </a:pPr>
                       <a:r>
-                        <a:rPr lang="ru-RU" sz="1300" b="0" i="0" u="none" strike="noStrike">
+                        <a:rPr lang="ru-RU" sz="1300" b="0" i="0" u="none" strike="noStrike" dirty="0">
                           <a:solidFill>
                             <a:srgbClr val="000000"/>
                           </a:solidFill>
@@ -19537,7 +19805,7 @@
                         </a:rPr>
                         <a:t>6,76</a:t>
                       </a:r>
-                      <a:endParaRPr lang="ru-RU" sz="1300" b="0" i="0" u="none" strike="noStrike">
+                      <a:endParaRPr lang="ru-RU" sz="1300" b="0" i="0" u="none" strike="noStrike" dirty="0">
                         <a:effectLst/>
                         <a:latin typeface="Arial" panose="020B0604020202020204" pitchFamily="34" charset="0"/>
                       </a:endParaRPr>
@@ -19580,7 +19848,9 @@
                       <a:headEnd type="none" w="med" len="med"/>
                       <a:tailEnd type="none" w="med" len="med"/>
                     </a:lnB>
-                    <a:noFill/>
+                    <a:solidFill>
+                      <a:srgbClr val="0070C0"/>
+                    </a:solidFill>
                   </a:tcPr>
                 </a:tc>
                 <a:tc>
@@ -19644,7 +19914,9 @@
                       <a:headEnd type="none" w="med" len="med"/>
                       <a:tailEnd type="none" w="med" len="med"/>
                     </a:lnB>
-                    <a:noFill/>
+                    <a:solidFill>
+                      <a:srgbClr val="0070C0"/>
+                    </a:solidFill>
                   </a:tcPr>
                 </a:tc>
                 <a:tc>
@@ -19708,7 +19980,9 @@
                       <a:headEnd type="none" w="med" len="med"/>
                       <a:tailEnd type="none" w="med" len="med"/>
                     </a:lnB>
-                    <a:noFill/>
+                    <a:solidFill>
+                      <a:srgbClr val="0070C0"/>
+                    </a:solidFill>
                   </a:tcPr>
                 </a:tc>
                 <a:extLst>
@@ -19789,7 +20063,9 @@
                       <a:headEnd type="none" w="med" len="med"/>
                       <a:tailEnd type="none" w="med" len="med"/>
                     </a:lnB>
-                    <a:noFill/>
+                    <a:solidFill>
+                      <a:srgbClr val="0070C0"/>
+                    </a:solidFill>
                   </a:tcPr>
                 </a:tc>
                 <a:tc>
@@ -19801,7 +20077,7 @@
                         <a:buNone/>
                       </a:pPr>
                       <a:r>
-                        <a:rPr lang="ru-RU" sz="1300" b="0" i="0" u="none" strike="noStrike">
+                        <a:rPr lang="ru-RU" sz="1300" b="0" i="0" u="none" strike="noStrike" dirty="0">
                           <a:solidFill>
                             <a:srgbClr val="000000"/>
                           </a:solidFill>
@@ -19810,7 +20086,7 @@
                         </a:rPr>
                         <a:t>7,00</a:t>
                       </a:r>
-                      <a:endParaRPr lang="ru-RU" sz="1300" b="0" i="0" u="none" strike="noStrike">
+                      <a:endParaRPr lang="ru-RU" sz="1300" b="0" i="0" u="none" strike="noStrike" dirty="0">
                         <a:effectLst/>
                         <a:latin typeface="Arial" panose="020B0604020202020204" pitchFamily="34" charset="0"/>
                       </a:endParaRPr>
@@ -19853,7 +20129,9 @@
                       <a:headEnd type="none" w="med" len="med"/>
                       <a:tailEnd type="none" w="med" len="med"/>
                     </a:lnB>
-                    <a:noFill/>
+                    <a:solidFill>
+                      <a:srgbClr val="0070C0"/>
+                    </a:solidFill>
                   </a:tcPr>
                 </a:tc>
                 <a:tc>
@@ -19865,7 +20143,7 @@
                         <a:buNone/>
                       </a:pPr>
                       <a:r>
-                        <a:rPr lang="ru-RU" sz="1300" b="0" i="0" u="none" strike="noStrike">
+                        <a:rPr lang="ru-RU" sz="1300" b="0" i="0" u="none" strike="noStrike" dirty="0">
                           <a:solidFill>
                             <a:srgbClr val="000000"/>
                           </a:solidFill>
@@ -19874,7 +20152,7 @@
                         </a:rPr>
                         <a:t>7,97</a:t>
                       </a:r>
-                      <a:endParaRPr lang="ru-RU" sz="1300" b="0" i="0" u="none" strike="noStrike">
+                      <a:endParaRPr lang="ru-RU" sz="1300" b="0" i="0" u="none" strike="noStrike" dirty="0">
                         <a:effectLst/>
                         <a:latin typeface="Arial" panose="020B0604020202020204" pitchFamily="34" charset="0"/>
                       </a:endParaRPr>
@@ -19917,7 +20195,9 @@
                       <a:headEnd type="none" w="med" len="med"/>
                       <a:tailEnd type="none" w="med" len="med"/>
                     </a:lnB>
-                    <a:noFill/>
+                    <a:solidFill>
+                      <a:srgbClr val="0070C0"/>
+                    </a:solidFill>
                   </a:tcPr>
                 </a:tc>
                 <a:tc>
@@ -19981,7 +20261,9 @@
                       <a:headEnd type="none" w="med" len="med"/>
                       <a:tailEnd type="none" w="med" len="med"/>
                     </a:lnB>
-                    <a:noFill/>
+                    <a:solidFill>
+                      <a:srgbClr val="0070C0"/>
+                    </a:solidFill>
                   </a:tcPr>
                 </a:tc>
                 <a:tc>
@@ -19993,7 +20275,7 @@
                         <a:buNone/>
                       </a:pPr>
                       <a:r>
-                        <a:rPr lang="ru-RU" sz="1300" b="0" i="0" u="none" strike="noStrike">
+                        <a:rPr lang="ru-RU" sz="1300" b="0" i="0" u="none" strike="noStrike" dirty="0">
                           <a:solidFill>
                             <a:srgbClr val="000000"/>
                           </a:solidFill>
@@ -20002,7 +20284,7 @@
                         </a:rPr>
                         <a:t>1,18</a:t>
                       </a:r>
-                      <a:endParaRPr lang="ru-RU" sz="1300" b="0" i="0" u="none" strike="noStrike">
+                      <a:endParaRPr lang="ru-RU" sz="1300" b="0" i="0" u="none" strike="noStrike" dirty="0">
                         <a:effectLst/>
                         <a:latin typeface="Arial" panose="020B0604020202020204" pitchFamily="34" charset="0"/>
                       </a:endParaRPr>
@@ -20045,7 +20327,9 @@
                       <a:headEnd type="none" w="med" len="med"/>
                       <a:tailEnd type="none" w="med" len="med"/>
                     </a:lnB>
-                    <a:noFill/>
+                    <a:solidFill>
+                      <a:srgbClr val="0070C0"/>
+                    </a:solidFill>
                   </a:tcPr>
                 </a:tc>
                 <a:extLst>
@@ -20064,7 +20348,7 @@
                         <a:buNone/>
                       </a:pPr>
                       <a:r>
-                        <a:rPr lang="ru-RU" sz="1300" b="0" i="0" u="none" strike="noStrike">
+                        <a:rPr lang="ru-RU" sz="1300" b="0" i="0" u="none" strike="noStrike" dirty="0">
                           <a:solidFill>
                             <a:srgbClr val="000000"/>
                           </a:solidFill>
@@ -20074,7 +20358,7 @@
                         <a:t>Звук.</a:t>
                       </a:r>
                       <a:r>
-                        <a:rPr lang="en-US" sz="1300" b="0" i="0" u="none" strike="noStrike">
+                        <a:rPr lang="en-US" sz="1300" b="0" i="0" u="none" strike="noStrike" dirty="0">
                           <a:solidFill>
                             <a:srgbClr val="000000"/>
                           </a:solidFill>
@@ -20083,7 +20367,7 @@
                         </a:rPr>
                         <a:t>wav</a:t>
                       </a:r>
-                      <a:endParaRPr lang="en-US" sz="1300" b="0" i="0" u="none" strike="noStrike">
+                      <a:endParaRPr lang="en-US" sz="1300" b="0" i="0" u="none" strike="noStrike" dirty="0">
                         <a:effectLst/>
                         <a:latin typeface="Arial" panose="020B0604020202020204" pitchFamily="34" charset="0"/>
                       </a:endParaRPr>
@@ -20126,7 +20410,11 @@
                       <a:headEnd type="none" w="med" len="med"/>
                       <a:tailEnd type="none" w="med" len="med"/>
                     </a:lnB>
-                    <a:noFill/>
+                    <a:solidFill>
+                      <a:schemeClr val="accent2">
+                        <a:lumMod val="75000"/>
+                      </a:schemeClr>
+                    </a:solidFill>
                   </a:tcPr>
                 </a:tc>
                 <a:tc>
@@ -20190,7 +20478,11 @@
                       <a:headEnd type="none" w="med" len="med"/>
                       <a:tailEnd type="none" w="med" len="med"/>
                     </a:lnB>
-                    <a:noFill/>
+                    <a:solidFill>
+                      <a:schemeClr val="accent2">
+                        <a:lumMod val="75000"/>
+                      </a:schemeClr>
+                    </a:solidFill>
                   </a:tcPr>
                 </a:tc>
                 <a:tc>
@@ -20254,7 +20546,11 @@
                       <a:headEnd type="none" w="med" len="med"/>
                       <a:tailEnd type="none" w="med" len="med"/>
                     </a:lnB>
-                    <a:noFill/>
+                    <a:solidFill>
+                      <a:schemeClr val="accent2">
+                        <a:lumMod val="75000"/>
+                      </a:schemeClr>
+                    </a:solidFill>
                   </a:tcPr>
                 </a:tc>
                 <a:tc>
@@ -20318,7 +20614,11 @@
                       <a:headEnd type="none" w="med" len="med"/>
                       <a:tailEnd type="none" w="med" len="med"/>
                     </a:lnB>
-                    <a:noFill/>
+                    <a:solidFill>
+                      <a:schemeClr val="accent2">
+                        <a:lumMod val="75000"/>
+                      </a:schemeClr>
+                    </a:solidFill>
                   </a:tcPr>
                 </a:tc>
                 <a:tc>
@@ -20382,7 +20682,11 @@
                       <a:headEnd type="none" w="med" len="med"/>
                       <a:tailEnd type="none" w="med" len="med"/>
                     </a:lnB>
-                    <a:noFill/>
+                    <a:solidFill>
+                      <a:schemeClr val="accent2">
+                        <a:lumMod val="75000"/>
+                      </a:schemeClr>
+                    </a:solidFill>
                   </a:tcPr>
                 </a:tc>
                 <a:extLst>
@@ -20401,7 +20705,7 @@
                         <a:buNone/>
                       </a:pPr>
                       <a:r>
-                        <a:rPr lang="ru-RU" sz="1300" b="0" i="0" u="none" strike="noStrike">
+                        <a:rPr lang="ru-RU" sz="1300" b="0" i="0" u="none" strike="noStrike" dirty="0">
                           <a:solidFill>
                             <a:srgbClr val="000000"/>
                           </a:solidFill>
@@ -20411,7 +20715,7 @@
                         <a:t>Звук_7</a:t>
                       </a:r>
                       <a:r>
-                        <a:rPr lang="en-US" sz="1300" b="0" i="0" u="none" strike="noStrike">
+                        <a:rPr lang="en-US" sz="1300" b="0" i="0" u="none" strike="noStrike" dirty="0">
                           <a:solidFill>
                             <a:srgbClr val="000000"/>
                           </a:solidFill>
@@ -20420,7 +20724,7 @@
                         </a:rPr>
                         <a:t>z.wav</a:t>
                       </a:r>
-                      <a:endParaRPr lang="en-US" sz="1300" b="0" i="0" u="none" strike="noStrike">
+                      <a:endParaRPr lang="en-US" sz="1300" b="0" i="0" u="none" strike="noStrike" dirty="0">
                         <a:effectLst/>
                         <a:latin typeface="Arial" panose="020B0604020202020204" pitchFamily="34" charset="0"/>
                       </a:endParaRPr>
@@ -20463,7 +20767,11 @@
                       <a:headEnd type="none" w="med" len="med"/>
                       <a:tailEnd type="none" w="med" len="med"/>
                     </a:lnB>
-                    <a:noFill/>
+                    <a:solidFill>
+                      <a:schemeClr val="accent2">
+                        <a:lumMod val="75000"/>
+                      </a:schemeClr>
+                    </a:solidFill>
                   </a:tcPr>
                 </a:tc>
                 <a:tc>
@@ -20527,7 +20835,11 @@
                       <a:headEnd type="none" w="med" len="med"/>
                       <a:tailEnd type="none" w="med" len="med"/>
                     </a:lnB>
-                    <a:noFill/>
+                    <a:solidFill>
+                      <a:schemeClr val="accent2">
+                        <a:lumMod val="75000"/>
+                      </a:schemeClr>
+                    </a:solidFill>
                   </a:tcPr>
                 </a:tc>
                 <a:tc>
@@ -20591,7 +20903,11 @@
                       <a:headEnd type="none" w="med" len="med"/>
                       <a:tailEnd type="none" w="med" len="med"/>
                     </a:lnB>
-                    <a:noFill/>
+                    <a:solidFill>
+                      <a:schemeClr val="accent2">
+                        <a:lumMod val="75000"/>
+                      </a:schemeClr>
+                    </a:solidFill>
                   </a:tcPr>
                 </a:tc>
                 <a:tc>
@@ -20655,7 +20971,11 @@
                       <a:headEnd type="none" w="med" len="med"/>
                       <a:tailEnd type="none" w="med" len="med"/>
                     </a:lnB>
-                    <a:noFill/>
+                    <a:solidFill>
+                      <a:schemeClr val="accent2">
+                        <a:lumMod val="75000"/>
+                      </a:schemeClr>
+                    </a:solidFill>
                   </a:tcPr>
                 </a:tc>
                 <a:tc>
@@ -20719,7 +21039,11 @@
                       <a:headEnd type="none" w="med" len="med"/>
                       <a:tailEnd type="none" w="med" len="med"/>
                     </a:lnB>
-                    <a:noFill/>
+                    <a:solidFill>
+                      <a:schemeClr val="accent2">
+                        <a:lumMod val="75000"/>
+                      </a:schemeClr>
+                    </a:solidFill>
                   </a:tcPr>
                 </a:tc>
                 <a:extLst>
@@ -20738,7 +21062,7 @@
                         <a:buNone/>
                       </a:pPr>
                       <a:r>
-                        <a:rPr lang="ru-RU" sz="1300" b="0" i="0" u="none" strike="noStrike">
+                        <a:rPr lang="ru-RU" sz="1300" b="0" i="0" u="none" strike="noStrike" dirty="0">
                           <a:solidFill>
                             <a:srgbClr val="000000"/>
                           </a:solidFill>
@@ -20748,7 +21072,7 @@
                         <a:t>Звук.</a:t>
                       </a:r>
                       <a:r>
-                        <a:rPr lang="en-US" sz="1300" b="0" i="0" u="none" strike="noStrike">
+                        <a:rPr lang="en-US" sz="1300" b="0" i="0" u="none" strike="noStrike" dirty="0">
                           <a:solidFill>
                             <a:srgbClr val="000000"/>
                           </a:solidFill>
@@ -20757,7 +21081,7 @@
                         </a:rPr>
                         <a:t>mp3</a:t>
                       </a:r>
-                      <a:endParaRPr lang="en-US" sz="1300" b="0" i="0" u="none" strike="noStrike">
+                      <a:endParaRPr lang="en-US" sz="1300" b="0" i="0" u="none" strike="noStrike" dirty="0">
                         <a:effectLst/>
                         <a:latin typeface="Arial" panose="020B0604020202020204" pitchFamily="34" charset="0"/>
                       </a:endParaRPr>
@@ -20800,7 +21124,11 @@
                       <a:headEnd type="none" w="med" len="med"/>
                       <a:tailEnd type="none" w="med" len="med"/>
                     </a:lnB>
-                    <a:noFill/>
+                    <a:solidFill>
+                      <a:schemeClr val="accent2">
+                        <a:lumMod val="75000"/>
+                      </a:schemeClr>
+                    </a:solidFill>
                   </a:tcPr>
                 </a:tc>
                 <a:tc>
@@ -20864,7 +21192,11 @@
                       <a:headEnd type="none" w="med" len="med"/>
                       <a:tailEnd type="none" w="med" len="med"/>
                     </a:lnB>
-                    <a:noFill/>
+                    <a:solidFill>
+                      <a:schemeClr val="accent2">
+                        <a:lumMod val="75000"/>
+                      </a:schemeClr>
+                    </a:solidFill>
                   </a:tcPr>
                 </a:tc>
                 <a:tc>
@@ -20876,7 +21208,7 @@
                         <a:buNone/>
                       </a:pPr>
                       <a:r>
-                        <a:rPr lang="ru-RU" sz="1300" b="0" i="0" u="none" strike="noStrike">
+                        <a:rPr lang="ru-RU" sz="1300" b="0" i="0" u="none" strike="noStrike" dirty="0">
                           <a:solidFill>
                             <a:srgbClr val="000000"/>
                           </a:solidFill>
@@ -20885,7 +21217,7 @@
                         </a:rPr>
                         <a:t>7,85</a:t>
                       </a:r>
-                      <a:endParaRPr lang="ru-RU" sz="1300" b="0" i="0" u="none" strike="noStrike">
+                      <a:endParaRPr lang="ru-RU" sz="1300" b="0" i="0" u="none" strike="noStrike" dirty="0">
                         <a:effectLst/>
                         <a:latin typeface="Arial" panose="020B0604020202020204" pitchFamily="34" charset="0"/>
                       </a:endParaRPr>
@@ -20928,71 +21260,11 @@
                       <a:headEnd type="none" w="med" len="med"/>
                       <a:tailEnd type="none" w="med" len="med"/>
                     </a:lnB>
-                    <a:noFill/>
-                  </a:tcPr>
-                </a:tc>
-                <a:tc>
-                  <a:txBody>
-                    <a:bodyPr/>
-                    <a:lstStyle/>
-                    <a:p>
-                      <a:pPr algn="ctr" fontAlgn="ctr">
-                        <a:buNone/>
-                      </a:pPr>
-                      <a:r>
-                        <a:rPr lang="ru-RU" sz="1300" b="0" i="0" u="none" strike="noStrike">
-                          <a:solidFill>
-                            <a:srgbClr val="000000"/>
-                          </a:solidFill>
-                          <a:effectLst/>
-                          <a:latin typeface="Aptos Narrow" panose="020B0004020202020204" pitchFamily="34" charset="0"/>
-                        </a:rPr>
-                        <a:t>-</a:t>
-                      </a:r>
-                      <a:endParaRPr lang="ru-RU" sz="1300" b="0" i="0" u="none" strike="noStrike">
-                        <a:effectLst/>
-                        <a:latin typeface="Arial" panose="020B0604020202020204" pitchFamily="34" charset="0"/>
-                      </a:endParaRPr>
-                    </a:p>
-                  </a:txBody>
-                  <a:tcPr marL="4962" marR="4962" marT="4962" marB="0" anchor="ctr">
-                    <a:lnL w="6350" cap="flat" cmpd="sng" algn="ctr">
-                      <a:solidFill>
-                        <a:srgbClr val="000000"/>
-                      </a:solidFill>
-                      <a:prstDash val="solid"/>
-                      <a:round/>
-                      <a:headEnd type="none" w="med" len="med"/>
-                      <a:tailEnd type="none" w="med" len="med"/>
-                    </a:lnL>
-                    <a:lnR w="6350" cap="flat" cmpd="sng" algn="ctr">
-                      <a:solidFill>
-                        <a:srgbClr val="000000"/>
-                      </a:solidFill>
-                      <a:prstDash val="solid"/>
-                      <a:round/>
-                      <a:headEnd type="none" w="med" len="med"/>
-                      <a:tailEnd type="none" w="med" len="med"/>
-                    </a:lnR>
-                    <a:lnT w="6350" cap="flat" cmpd="sng" algn="ctr">
-                      <a:solidFill>
-                        <a:srgbClr val="000000"/>
-                      </a:solidFill>
-                      <a:prstDash val="solid"/>
-                      <a:round/>
-                      <a:headEnd type="none" w="med" len="med"/>
-                      <a:tailEnd type="none" w="med" len="med"/>
-                    </a:lnT>
-                    <a:lnB w="6350" cap="flat" cmpd="sng" algn="ctr">
-                      <a:solidFill>
-                        <a:srgbClr val="000000"/>
-                      </a:solidFill>
-                      <a:prstDash val="solid"/>
-                      <a:round/>
-                      <a:headEnd type="none" w="med" len="med"/>
-                      <a:tailEnd type="none" w="med" len="med"/>
-                    </a:lnB>
-                    <a:noFill/>
+                    <a:solidFill>
+                      <a:schemeClr val="accent2">
+                        <a:lumMod val="75000"/>
+                      </a:schemeClr>
+                    </a:solidFill>
                   </a:tcPr>
                 </a:tc>
                 <a:tc>
@@ -21056,7 +21328,79 @@
                       <a:headEnd type="none" w="med" len="med"/>
                       <a:tailEnd type="none" w="med" len="med"/>
                     </a:lnB>
-                    <a:noFill/>
+                    <a:solidFill>
+                      <a:schemeClr val="accent2">
+                        <a:lumMod val="75000"/>
+                      </a:schemeClr>
+                    </a:solidFill>
+                  </a:tcPr>
+                </a:tc>
+                <a:tc>
+                  <a:txBody>
+                    <a:bodyPr/>
+                    <a:lstStyle/>
+                    <a:p>
+                      <a:pPr algn="ctr" fontAlgn="ctr">
+                        <a:buNone/>
+                      </a:pPr>
+                      <a:r>
+                        <a:rPr lang="ru-RU" sz="1300" b="0" i="0" u="none" strike="noStrike" dirty="0">
+                          <a:solidFill>
+                            <a:srgbClr val="000000"/>
+                          </a:solidFill>
+                          <a:effectLst/>
+                          <a:latin typeface="Aptos Narrow" panose="020B0004020202020204" pitchFamily="34" charset="0"/>
+                        </a:rPr>
+                        <a:t>-</a:t>
+                      </a:r>
+                      <a:endParaRPr lang="ru-RU" sz="1300" b="0" i="0" u="none" strike="noStrike" dirty="0">
+                        <a:effectLst/>
+                        <a:latin typeface="Arial" panose="020B0604020202020204" pitchFamily="34" charset="0"/>
+                      </a:endParaRPr>
+                    </a:p>
+                  </a:txBody>
+                  <a:tcPr marL="4962" marR="4962" marT="4962" marB="0" anchor="ctr">
+                    <a:lnL w="6350" cap="flat" cmpd="sng" algn="ctr">
+                      <a:solidFill>
+                        <a:srgbClr val="000000"/>
+                      </a:solidFill>
+                      <a:prstDash val="solid"/>
+                      <a:round/>
+                      <a:headEnd type="none" w="med" len="med"/>
+                      <a:tailEnd type="none" w="med" len="med"/>
+                    </a:lnL>
+                    <a:lnR w="6350" cap="flat" cmpd="sng" algn="ctr">
+                      <a:solidFill>
+                        <a:srgbClr val="000000"/>
+                      </a:solidFill>
+                      <a:prstDash val="solid"/>
+                      <a:round/>
+                      <a:headEnd type="none" w="med" len="med"/>
+                      <a:tailEnd type="none" w="med" len="med"/>
+                    </a:lnR>
+                    <a:lnT w="6350" cap="flat" cmpd="sng" algn="ctr">
+                      <a:solidFill>
+                        <a:srgbClr val="000000"/>
+                      </a:solidFill>
+                      <a:prstDash val="solid"/>
+                      <a:round/>
+                      <a:headEnd type="none" w="med" len="med"/>
+                      <a:tailEnd type="none" w="med" len="med"/>
+                    </a:lnT>
+                    <a:lnB w="6350" cap="flat" cmpd="sng" algn="ctr">
+                      <a:solidFill>
+                        <a:srgbClr val="000000"/>
+                      </a:solidFill>
+                      <a:prstDash val="solid"/>
+                      <a:round/>
+                      <a:headEnd type="none" w="med" len="med"/>
+                      <a:tailEnd type="none" w="med" len="med"/>
+                    </a:lnB>
+                    <a:solidFill>
+                      <a:schemeClr val="accent2">
+                        <a:lumMod val="75000"/>
+                      </a:schemeClr>
+                    </a:solidFill>
                   </a:tcPr>
                 </a:tc>
                 <a:extLst>
@@ -21137,7 +21481,11 @@
                       <a:headEnd type="none" w="med" len="med"/>
                       <a:tailEnd type="none" w="med" len="med"/>
                     </a:lnB>
-                    <a:noFill/>
+                    <a:solidFill>
+                      <a:schemeClr val="accent2">
+                        <a:lumMod val="75000"/>
+                      </a:schemeClr>
+                    </a:solidFill>
                   </a:tcPr>
                 </a:tc>
                 <a:tc>
@@ -21201,7 +21549,11 @@
                       <a:headEnd type="none" w="med" len="med"/>
                       <a:tailEnd type="none" w="med" len="med"/>
                     </a:lnB>
-                    <a:noFill/>
+                    <a:solidFill>
+                      <a:schemeClr val="accent2">
+                        <a:lumMod val="75000"/>
+                      </a:schemeClr>
+                    </a:solidFill>
                   </a:tcPr>
                 </a:tc>
                 <a:tc>
@@ -21265,7 +21617,11 @@
                       <a:headEnd type="none" w="med" len="med"/>
                       <a:tailEnd type="none" w="med" len="med"/>
                     </a:lnB>
-                    <a:noFill/>
+                    <a:solidFill>
+                      <a:schemeClr val="accent2">
+                        <a:lumMod val="75000"/>
+                      </a:schemeClr>
+                    </a:solidFill>
                   </a:tcPr>
                 </a:tc>
                 <a:tc>
@@ -21329,7 +21685,11 @@
                       <a:headEnd type="none" w="med" len="med"/>
                       <a:tailEnd type="none" w="med" len="med"/>
                     </a:lnB>
-                    <a:noFill/>
+                    <a:solidFill>
+                      <a:schemeClr val="accent2">
+                        <a:lumMod val="75000"/>
+                      </a:schemeClr>
+                    </a:solidFill>
                   </a:tcPr>
                 </a:tc>
                 <a:tc>
@@ -21393,7 +21753,11 @@
                       <a:headEnd type="none" w="med" len="med"/>
                       <a:tailEnd type="none" w="med" len="med"/>
                     </a:lnB>
-                    <a:noFill/>
+                    <a:solidFill>
+                      <a:schemeClr val="accent2">
+                        <a:lumMod val="75000"/>
+                      </a:schemeClr>
+                    </a:solidFill>
                   </a:tcPr>
                 </a:tc>
                 <a:extLst>
@@ -21866,7 +22230,7 @@
             <a:pPr algn="l"/>
             <a:r>
               <a:rPr lang="ru-RU" sz="1700" dirty="0"/>
-              <a:t>Мы взяли программу на языке C, которая решает заданную функцию: </a:t>
+              <a:t>Мы взяли программу на языке C, которая вычисляет заданную функцию: </a:t>
             </a:r>
           </a:p>
           <a:p>
